--- a/decks/mobilitetsatlas-intro/Mobilitetsatlas-introduktion.pptx
+++ b/decks/mobilitetsatlas-intro/Mobilitetsatlas-introduktion.pptx
@@ -2563,7 +2563,7 @@
           <a:p>
             <a:r>
               <a:rPr lang="en-US" dirty="0"/>
-              <a:t>This is your municipality's page, and the URL is on the slide — open it in a browser tab if you want to drive it live. Three things to point at: the detailed map with cell-level grades, the five-year trend from Statistics Denmark, and "Ask about mobility", which answers from your own municipal and regional plans with the source documents linked. All of it CC BY-SA: screenshot it, quote it, put it in your own papers.</a:t>
+              <a:t>This map is live in the slide — drag it, zoom, toggle the routes and the frequency. It is the atlas itself, not a screenshot. Three things to point at: the detailed map with cell-level grades, the five-year trend from Statistics Denmark, and "Ask about mobility", which answers from your own municipal and regional plans with the source documents linked. All of it CC BY-SA: screenshot it, quote it, put it in your own papers.</a:t>
             </a:r>
             <a:endParaRPr lang="en-US" dirty="0"/>
           </a:p>
@@ -2827,7 +2827,7 @@
           <a:p>
             <a:r>
               <a:rPr lang="en-US" dirty="0"/>
-              <a:t>On the site the horizontal axis is a dropdown: spending per resident, car ownership, population density, road casualties. The table underneath sorts on both measures. Worth opening in a browser tab if the room starts asking "what about X".</a:t>
+              <a:t>This one is live too — the horizontal axis is a dropdown: spending per resident, car ownership, population density, road casualties. The table underneath sorts on both measures. Worth opening in a browser tab if the room starts asking "what about X".</a:t>
             </a:r>
             <a:endParaRPr lang="en-US" dirty="0"/>
           </a:p>
@@ -5931,7 +5931,7 @@
                 <a:ea typeface="Playfair Display" pitchFamily="34" charset="-122"/>
                 <a:cs typeface="Playfair Display" pitchFamily="34" charset="-120"/>
               </a:rPr>
-              <a:t>Every municipality has a page</a:t>
+              <a:t>Aarhus, live on the map</a:t>
             </a:r>
             <a:endParaRPr lang="en-US" sz="3000" dirty="0"/>
           </a:p>
@@ -6060,7 +6060,7 @@
                 <a:ea typeface="DM Mono" pitchFamily="34" charset="-122"/>
                 <a:cs typeface="DM Mono" pitchFamily="34" charset="-120"/>
               </a:rPr>
-              <a:t>mobilitetsatlas.dk/en/kommune/aarhus  ·  CC BY-SA 4.0</a:t>
+              <a:t>mobilitetsatlas.dk/en/embed/kommune/aarhus  ·  CC BY-SA 4.0</a:t>
             </a:r>
             <a:endParaRPr lang="en-US" sz="975" dirty="0"/>
           </a:p>
@@ -7418,7 +7418,7 @@
                 <a:ea typeface="Playfair Display" pitchFamily="34" charset="-122"/>
                 <a:cs typeface="Playfair Display" pitchFamily="34" charset="-120"/>
               </a:rPr>
-              <a:t>Compare on any measure</a:t>
+              <a:t>Explore, live</a:t>
             </a:r>
             <a:endParaRPr lang="en-US" sz="3000" dirty="0"/>
           </a:p>
@@ -7644,7 +7644,7 @@
                 <a:ea typeface="Inter" pitchFamily="34" charset="-122"/>
                 <a:cs typeface="Inter" pitchFamily="34" charset="-120"/>
               </a:rPr>
-              <a:t>On the live map, press </a:t>
+              <a:t>This map is </a:t>
             </a:r>
             <a:pPr algn="l" indent="0" marL="0">
               <a:lnSpc>
@@ -7661,7 +7661,7 @@
                 <a:ea typeface="Inter" pitchFamily="34" charset="-122"/>
                 <a:cs typeface="Inter" pitchFamily="34" charset="-120"/>
               </a:rPr>
-              <a:t>Byvisning</a:t>
+              <a:t>live</a:t>
             </a:r>
             <a:pPr algn="l" indent="0" marL="0">
               <a:lnSpc>
@@ -7678,7 +7678,7 @@
                 <a:ea typeface="Inter" pitchFamily="34" charset="-122"/>
                 <a:cs typeface="Inter" pitchFamily="34" charset="-120"/>
               </a:rPr>
-              <a:t> and zoom in: the buildings rise and the day's scheduled services move across them.</a:t>
+              <a:t>: drag it, zoom in, and the buildings rise as the day's scheduled services move across them.</a:t>
             </a:r>
             <a:endParaRPr lang="en-US" sz="1125" dirty="0"/>
           </a:p>

--- a/decks/mobilitetsatlas-intro/Mobilitetsatlas-introduktion.pptx
+++ b/decks/mobilitetsatlas-intro/Mobilitetsatlas-introduktion.pptx
@@ -2563,7 +2563,7 @@
           <a:p>
             <a:r>
               <a:rPr lang="en-US" dirty="0"/>
-              <a:t>This map is live in the slide — drag it, zoom, toggle the routes and the frequency. It is the atlas itself, not a screenshot. Three things to point at: the detailed map with cell-level grades, the five-year trend from Statistics Denmark, and "Ask about mobility", which answers from your own municipal and regional plans with the source documents linked. All of it CC BY-SA: screenshot it, quote it, put it in your own papers.</a:t>
+              <a:t>This is your municipality's page, and the URL is on the slide — open it in a browser tab if you want to drive it live. Three things to point at: the detailed map with cell-level grades, the five-year trend from Statistics Denmark, and "Ask about mobility", which answers from your own municipal and regional plans with the source documents linked. All of it CC BY-SA: screenshot it, quote it, put it in your own papers.</a:t>
             </a:r>
             <a:endParaRPr lang="en-US" dirty="0"/>
           </a:p>
@@ -2827,7 +2827,7 @@
           <a:p>
             <a:r>
               <a:rPr lang="en-US" dirty="0"/>
-              <a:t>This one is live too — the horizontal axis is a dropdown: spending per resident, car ownership, population density, road casualties. The table underneath sorts on both measures. Worth opening in a browser tab if the room starts asking "what about X".</a:t>
+              <a:t>On the site the horizontal axis is a dropdown: spending per resident, car ownership, population density, road casualties. The table underneath sorts on both measures. Worth opening in a browser tab if the room starts asking "what about X".</a:t>
             </a:r>
             <a:endParaRPr lang="en-US" dirty="0"/>
           </a:p>
@@ -5931,7 +5931,7 @@
                 <a:ea typeface="Playfair Display" pitchFamily="34" charset="-122"/>
                 <a:cs typeface="Playfair Display" pitchFamily="34" charset="-120"/>
               </a:rPr>
-              <a:t>Aarhus, live on the map</a:t>
+              <a:t>Every municipality has a page</a:t>
             </a:r>
             <a:endParaRPr lang="en-US" sz="3000" dirty="0"/>
           </a:p>
@@ -6060,7 +6060,7 @@
                 <a:ea typeface="DM Mono" pitchFamily="34" charset="-122"/>
                 <a:cs typeface="DM Mono" pitchFamily="34" charset="-120"/>
               </a:rPr>
-              <a:t>mobilitetsatlas.dk/en/embed/kommune/aarhus  ·  CC BY-SA 4.0</a:t>
+              <a:t>mobilitetsatlas.dk/en/kommune/aarhus  ·  CC BY-SA 4.0</a:t>
             </a:r>
             <a:endParaRPr lang="en-US" sz="975" dirty="0"/>
           </a:p>
@@ -7418,7 +7418,7 @@
                 <a:ea typeface="Playfair Display" pitchFamily="34" charset="-122"/>
                 <a:cs typeface="Playfair Display" pitchFamily="34" charset="-120"/>
               </a:rPr>
-              <a:t>Explore, live</a:t>
+              <a:t>Compare on any measure</a:t>
             </a:r>
             <a:endParaRPr lang="en-US" sz="3000" dirty="0"/>
           </a:p>
@@ -7644,7 +7644,7 @@
                 <a:ea typeface="Inter" pitchFamily="34" charset="-122"/>
                 <a:cs typeface="Inter" pitchFamily="34" charset="-120"/>
               </a:rPr>
-              <a:t>This map is </a:t>
+              <a:t>On the live map, press </a:t>
             </a:r>
             <a:pPr algn="l" indent="0" marL="0">
               <a:lnSpc>
@@ -7661,7 +7661,7 @@
                 <a:ea typeface="Inter" pitchFamily="34" charset="-122"/>
                 <a:cs typeface="Inter" pitchFamily="34" charset="-120"/>
               </a:rPr>
-              <a:t>live</a:t>
+              <a:t>Byvisning</a:t>
             </a:r>
             <a:pPr algn="l" indent="0" marL="0">
               <a:lnSpc>
@@ -7678,7 +7678,7 @@
                 <a:ea typeface="Inter" pitchFamily="34" charset="-122"/>
                 <a:cs typeface="Inter" pitchFamily="34" charset="-120"/>
               </a:rPr>
-              <a:t>: drag it, zoom in, and the buildings rise as the day's scheduled services move across them.</a:t>
+              <a:t> and zoom in: the buildings rise and the day's scheduled services move across them.</a:t>
             </a:r>
             <a:endParaRPr lang="en-US" sz="1125" dirty="0"/>
           </a:p>

--- a/decks/mobilitetsatlas-intro/Mobilitetsatlas-introduktion.pptx
+++ b/decks/mobilitetsatlas-intro/Mobilitetsatlas-introduktion.pptx
@@ -6060,7 +6060,7 @@
                 <a:ea typeface="DM Mono" pitchFamily="34" charset="-122"/>
                 <a:cs typeface="DM Mono" pitchFamily="34" charset="-120"/>
               </a:rPr>
-              <a:t>mobilitetsatlas.dk/en/embed/kommune/aarhus  ·  CC BY-SA 4.0</a:t>
+              <a:t>mobilitetsatlas.dk/en/kommune/aarhus  ·  CC BY-SA 4.0</a:t>
             </a:r>
             <a:endParaRPr lang="en-US" sz="975" dirty="0"/>
           </a:p>
@@ -7483,7 +7483,7 @@
                 <a:ea typeface="DM Mono" pitchFamily="34" charset="-122"/>
                 <a:cs typeface="DM Mono" pitchFamily="34" charset="-120"/>
               </a:rPr>
-              <a:t>mobilitetsatlas.dk/en/udforsk?x=families_with_car_pct  ·  ←  back</a:t>
+              <a:t>mobilitetsatlas.dk/en/udforsk  ·  ←  back</a:t>
             </a:r>
             <a:endParaRPr lang="en-US" sz="975" dirty="0"/>
           </a:p>

--- a/decks/mobilitetsatlas-intro/Mobilitetsatlas-introduktion.pptx
+++ b/decks/mobilitetsatlas-intro/Mobilitetsatlas-introduktion.pptx
@@ -2299,7 +2299,7 @@
           <a:p>
             <a:r>
               <a:rPr lang="en-US" dirty="0"/>
-              <a:t>Welcome. This is Danmarks Mobilitetsatlas: one comparable A–G mobility grade for every place in Denmark. Twenty minutes: what the grade measures, how it is calculated, and what it says about your municipality. The map behind me is the 29 municipalities graded E, F or G.</a:t>
+              <a:t>Danmarks Mobilitetsatlas gives every place in Denmark one comparable A–G grade for mobility. Twenty minutes: what the grade measures, how we calculate it, and what it says about your municipality. The map behind me is the 29 municipalities graded E, F or G.</a:t>
             </a:r>
             <a:endParaRPr lang="en-US" dirty="0"/>
           </a:p>
@@ -2387,7 +2387,7 @@
           <a:p>
             <a:r>
               <a:rPr lang="en-US" dirty="0"/>
-              <a:t>Now the part you came for: what this looks like for one municipality. Aarhus as the worked example, then the live site, then street level in København.</a:t>
+              <a:t>What this looks like for one municipality. Aarhus as the worked example, then the live site, then street level in København.</a:t>
             </a:r>
             <a:endParaRPr lang="en-US" dirty="0"/>
           </a:p>
@@ -2475,7 +2475,7 @@
           <a:p>
             <a:r>
               <a:rPr lang="en-US" dirty="0"/>
-              <a:t>Aarhus: 68.6, a B, twenty-fourth of ninety-eight. Read the two pillars, not just the letter — 70.5 for public-transport quality against 66.7 for transport choice. That balance is unusual and it is good news: it means public transport genuinely competes with the car here. In most municipalities the second number is far larger than the first, and that gap IS the car dependency.</a:t>
+              <a:t>Aarhus scores 68.6, a B, twenty-fourth of ninety-eight. Read the two pillars as well as the letter: 70.5 for public transport quality against 66.7 for transport choice. That balance is unusual, and it is good news. Public transport competes with the car here. In most municipalities the second number is far larger than the first, and that gap is the car dependency.</a:t>
             </a:r>
             <a:endParaRPr lang="en-US" dirty="0"/>
           </a:p>
@@ -2563,7 +2563,7 @@
           <a:p>
             <a:r>
               <a:rPr lang="en-US" dirty="0"/>
-              <a:t>This map is live in the slide — drag it, zoom, toggle the routes and the frequency. It is the atlas itself, not a screenshot. Three things to point at: the detailed map with cell-level grades, the five-year trend from Statistics Denmark, and "Ask about mobility", which answers from your own municipal and regional plans with the source documents linked. All of it CC BY-SA: screenshot it, quote it, put it in your own papers.</a:t>
+              <a:t>This map is live in the slide. Drag it, zoom, toggle the routes and the frequency. Three things to point at: the detailed map with cell-level grades, the five-year trend from Statistics Denmark, and "Ask about mobility", which answers from your own municipal and regional plans with the source documents linked. All of it CC BY-SA: screenshot it, quote it, put it in your own papers.</a:t>
             </a:r>
             <a:endParaRPr lang="en-US" dirty="0"/>
           </a:p>
@@ -2651,7 +2651,7 @@
           <a:p>
             <a:r>
               <a:rPr lang="en-US" dirty="0"/>
-              <a:t>The band descriptions are published, not improvised — they come out of the league table itself, so they cannot drift from the thresholds.</a:t>
+              <a:t>The band descriptions come out of the published league table itself, so they cannot drift from the thresholds.</a:t>
             </a:r>
             <a:endParaRPr lang="en-US" dirty="0"/>
           </a:p>
@@ -2739,7 +2739,7 @@
           <a:p>
             <a:r>
               <a:rPr lang="en-US" dirty="0"/>
-              <a:t>Every municipality, one dot, coloured by grade. Horizontally: the share of families owning a car, from Statistics Denmark. Vertically: mobility freedom. The correlation is minus 0.66 across all 98 — strong, but not destiny, and the spread at any given car ownership is the interesting part. Say the caveat out loud: a pattern between two numbers is not a cause. Click through for the live version where you can swap the horizontal axis.</a:t>
+              <a:t>Every municipality, one dot, coloured by grade. Horizontally the share of families owning a car, from Statistics Denmark. Vertically mobility freedom. The correlation is minus 0.66 across all 98, and the spread at any given level of car ownership is the interesting part. Say the caveat out loud: a pattern between two numbers is not a cause. Click through for the live version, where the horizontal axis is a dropdown.</a:t>
             </a:r>
             <a:endParaRPr lang="en-US" dirty="0"/>
           </a:p>
@@ -2827,7 +2827,7 @@
           <a:p>
             <a:r>
               <a:rPr lang="en-US" dirty="0"/>
-              <a:t>This one is live too — the horizontal axis is a dropdown: spending per resident, car ownership, population density, road casualties. The table underneath sorts on both measures. Worth opening in a browser tab if the room starts asking "what about X".</a:t>
+              <a:t>Live as well. The horizontal axis is a dropdown: spending per resident, car ownership, population density, road casualties. The table underneath sorts on both measures. Worth opening in a browser tab when the room starts asking about one specific number.</a:t>
             </a:r>
             <a:endParaRPr lang="en-US" dirty="0"/>
           </a:p>
@@ -2915,7 +2915,7 @@
           <a:p>
             <a:r>
               <a:rPr lang="en-US" dirty="0"/>
-              <a:t>The last zoom level: København, street by street. Press Byvisning on any of the four largest municipalities and the map tilts into the buildings, with the day's scheduled services moving across it — the planned timetable, not live vehicles, and it says so on the panel. The green wash on the massing is the same A–G scale you have seen all deck, now at building resolution. This is where a planner stops nodding at a national average and starts pointing at a street.</a:t>
+              <a:t>The last zoom level: København, street by street. Press Byvisning on any of the four largest municipalities and the map tilts into the buildings, with the day's scheduled services moving across it. Planned timetable, not live vehicles, and the panel says so. The green wash on the massing is the same A–G scale as the rest of the deck, now at building resolution. This is where a planner stops nodding at a national average and starts pointing at a street.</a:t>
             </a:r>
             <a:endParaRPr lang="en-US" dirty="0"/>
           </a:p>
@@ -3003,7 +3003,7 @@
           <a:p>
             <a:r>
               <a:rPr lang="en-US" dirty="0"/>
-              <a:t>This is the slide to leave on screen during questions. Two of these six are not transport measures at all — housing near destinations, and new destinations — which is the argument for having the planning department in the room when the timetable is discussed. The grade is recomputed each edition, so a change in service shows up in the letter.</a:t>
+              <a:t>The slide to leave on screen during questions. Two of these six are not transport measures at all: housing near destinations, and new destinations. That is the argument for having the planning department in the room when the timetable is discussed. The grade is recomputed each edition, so a change in service shows up in the letter.</a:t>
             </a:r>
             <a:endParaRPr lang="en-US" dirty="0"/>
           </a:p>
@@ -3091,7 +3091,7 @@
           <a:p>
             <a:r>
               <a:rPr lang="en-US" dirty="0"/>
-              <a:t>Three ways in: look up your own municipality tonight, send us the plans we have missed, or sit down with us and go through your grade cell by cell. The atlas is CC BY-SA — take it, quote it, put it in your own papers.</a:t>
+              <a:t>Three ways in: look up your own municipality tonight, send us the plans we have missed, or sit down with us and go through your grade cell by cell. The atlas is CC BY-SA. Take it, quote it, put it in your own papers.</a:t>
             </a:r>
             <a:endParaRPr lang="en-US" dirty="0"/>
           </a:p>
@@ -3179,7 +3179,7 @@
           <a:p>
             <a:r>
               <a:rPr lang="en-US" dirty="0"/>
-              <a:t>Start where every mobility conversation starts: the network. Denmark has a serious public-transport backbone — these are the counted figures from the Rejseplanen feed, not estimates. But a stop outside your door is not the same as being able to get to work, school or the doctor. That gap is what the atlas measures: not what is scheduled, but where you can actually get to.</a:t>
+              <a:t>Denmark has a real public transport backbone. These are counted figures from the Rejseplanen feed, not estimates. But a stop outside your door is not the same as getting to work, school or the doctor. That gap is what the atlas measures.</a:t>
             </a:r>
             <a:endParaRPr lang="en-US" dirty="0"/>
           </a:p>
@@ -3267,7 +3267,7 @@
           <a:p>
             <a:r>
               <a:rPr lang="en-US" dirty="0"/>
-              <a:t>So we built one comparable grade. Two measured reaches: public-transport quality — how much of everyday life you reach without a car — and transport choice, how much further the car gets you. Their average is mobility freedom, 0 to 100, and that becomes a letter. The letter is the thing people remember; the score is the thing you can move.</a:t>
+              <a:t>One comparable grade, built from two measured reaches. Public transport quality is how much of everyday life you reach without a car. Transport choice is how much further the car gets you. Their average is mobility freedom, 0 to 100, and that becomes the letter. People remember the letter. The score is the part you can move.</a:t>
             </a:r>
             <a:endParaRPr lang="en-US" dirty="0"/>
           </a:p>
@@ -3355,7 +3355,7 @@
           <a:p>
             <a:r>
               <a:rPr lang="en-US" dirty="0"/>
-              <a:t>Watch the scale: the three weakest bands step forward. Twenty-nine of the ninety-eight municipalities are graded E, F or G — 1.15 million people, about one Dane in five, living somewhere the car is not really a choice. If your municipality is in that group, this is the slide that matters; if it is not, some of your neighbours are.</a:t>
+              <a:t>Watch the scale: the three weakest bands step forward. Twenty-nine of the ninety-eight municipalities are graded E, F or G. That is 1.15 million people, about one Dane in five, living where the car is not really a choice. If your municipality is in that group, this is your slide. If it is not, some of your neighbours are.</a:t>
             </a:r>
             <a:endParaRPr lang="en-US" dirty="0"/>
           </a:p>
@@ -3443,7 +3443,7 @@
           <a:p>
             <a:r>
               <a:rPr lang="en-US" dirty="0"/>
-              <a:t>This is the structural finding, and it is the one that reframes the conversation. Grouped by Statistics Denmark's own municipal classification, public-transport quality falls from 80 in the capital municipalities to 25 in the rural ones — a factor of 3.2. Population-weighted, so it is people, not map area. No municipality chose this; it is what density and distance do. But it does mean a national average is useless to you.</a:t>
+              <a:t>Grouped by Statistics Denmark's own municipal classification, public transport quality falls from 80 in the capital municipalities to 25 in the rural ones. A factor of 3.2, population-weighted, so this counts people rather than map area. No municipality chose this. It is what density and distance do. It does mean a national average is useless to you.</a:t>
             </a:r>
             <a:endParaRPr lang="en-US" dirty="0"/>
           </a:p>
@@ -3531,7 +3531,7 @@
           <a:p>
             <a:r>
               <a:rPr lang="en-US" dirty="0"/>
-              <a:t>Before any municipality accepts a letter grade, it wants to know how the letter was produced. So: the method, in four steps, and then the parts we do not yet capture.</a:t>
+              <a:t>Before any municipality accepts a letter grade, it wants to know how the letter was produced. Four steps, then the parts we do not yet capture.</a:t>
             </a:r>
             <a:endParaRPr lang="en-US" dirty="0"/>
           </a:p>
@@ -3619,7 +3619,7 @@
           <a:p>
             <a:r>
               <a:rPr lang="en-US" dirty="0"/>
-              <a:t>About 75,000 points across all 98 municipalities — every neighbourhood in the country. For each one we compute what is reachable, twice: once by public transport, once by car. Over 20 billion journeys in total. Destinations are scored on a saturating curve, so the tenth supermarket adds less than the first. Click the box at the bottom if anyone asks what is missing — and someone always does, which is why we put it on a slide.</a:t>
+              <a:t>About 75,000 points across all 98 municipalities, roughly every neighbourhood in the country. For each one we compute what is reachable twice, once by public transport and once by car. Over 20 billion journeys in total. Destinations score on a saturating curve, so the tenth supermarket adds less than the first. Click the box at the bottom if anyone asks what is missing. Someone always does, which is why it has its own slide.</a:t>
             </a:r>
             <a:endParaRPr lang="en-US" dirty="0"/>
           </a:p>
@@ -3707,7 +3707,7 @@
           <a:p>
             <a:r>
               <a:rPr lang="en-US" dirty="0"/>
-              <a:t>Say this one plainly. The two that matter most to a Danish municipality are Flextrafik and the bicycle — both work against exactly the municipalities that score lowest. Press ← or click anywhere to go back.</a:t>
+              <a:t>Say this one plainly. The two that matter most to a Danish municipality are Flextrafik and the bicycle. Both work against exactly the municipalities that score lowest. Press ← or click anywhere to go back.</a:t>
             </a:r>
             <a:endParaRPr lang="en-US" dirty="0"/>
           </a:p>
@@ -3795,7 +3795,7 @@
           <a:p>
             <a:r>
               <a:rPr lang="en-US" dirty="0"/>
-              <a:t>The whole distribution on one slide. Note the shape: it is not a bell curve. Denmark is bimodal — a large A group and a large D group, with very little in between. Roskilde on the right is the worked example from the method page: 70.7 and 66.3 average to 68.5, which is a B.</a:t>
+              <a:t>The whole distribution on one slide. The shape is not a bell curve. Denmark is bimodal: a large A group, a large D group, very little in between. Roskilde on the right is the worked example from the method page. 70.7 and 66.3 average to 68.5, which is a B.</a:t>
             </a:r>
             <a:endParaRPr lang="en-US" dirty="0"/>
           </a:p>
@@ -4373,7 +4373,7 @@
                 <a:ea typeface="Inter" pitchFamily="34" charset="-122"/>
                 <a:cs typeface="Inter" pitchFamily="34" charset="-120"/>
               </a:rPr>
-              <a:t>One comparable A–G grade for how freely people can move — with and without a car.</a:t>
+              <a:t>One comparable A–G grade for how freely people can move, with and without a car.</a:t>
             </a:r>
             <a:endParaRPr lang="en-US" sz="1800" dirty="0"/>
           </a:p>
@@ -5605,7 +5605,7 @@
                 <a:ea typeface="Inter" pitchFamily="34" charset="-122"/>
                 <a:cs typeface="Inter" pitchFamily="34" charset="-120"/>
               </a:rPr>
-              <a:t>The two pillars sit close together. Public transport genuinely competes with the car here — in most municipalities the second number is far larger than the first.</a:t>
+              <a:t>The two pillars sit close together. Public transport competes with the car here. In most municipalities the second number is far larger than the first.</a:t>
             </a:r>
             <a:endParaRPr lang="en-US" sz="1275" dirty="0"/>
           </a:p>
@@ -7218,7 +7218,7 @@
                 <a:ea typeface="Inter" pitchFamily="34" charset="-122"/>
                 <a:cs typeface="Inter" pitchFamily="34" charset="-120"/>
               </a:rPr>
-              <a:t>Where public transport reaches less, more families keep a car — but the spread at any given level is wide, and that spread is where policy lives.</a:t>
+              <a:t>Where public transport reaches less, more families keep a car. The spread at any given level is wide, and that spread is where policy lives.</a:t>
             </a:r>
             <a:endParaRPr lang="en-US" sz="1200" dirty="0"/>
           </a:p>
@@ -7230,7 +7230,7 @@
               <a:buNone/>
             </a:pPr>
             <a:r>
-              <a:rPr lang="en-US" sz="1200" b="1" dirty="0">
+              <a:rPr lang="en-US" sz="1200" dirty="0">
                 <a:solidFill>
                   <a:srgbClr val="666666"/>
                 </a:solidFill>
@@ -7644,41 +7644,7 @@
                 <a:ea typeface="Inter" pitchFamily="34" charset="-122"/>
                 <a:cs typeface="Inter" pitchFamily="34" charset="-120"/>
               </a:rPr>
-              <a:t>This map is </a:t>
-            </a:r>
-            <a:pPr algn="l" indent="0" marL="0">
-              <a:lnSpc>
-                <a:spcPct val="145000"/>
-              </a:lnSpc>
-              <a:buNone/>
-            </a:pPr>
-            <a:r>
-              <a:rPr lang="en-US" sz="1125" b="1" dirty="0">
-                <a:solidFill>
-                  <a:srgbClr val="999999"/>
-                </a:solidFill>
-                <a:latin typeface="Inter" pitchFamily="34" charset="0"/>
-                <a:ea typeface="Inter" pitchFamily="34" charset="-122"/>
-                <a:cs typeface="Inter" pitchFamily="34" charset="-120"/>
-              </a:rPr>
-              <a:t>live</a:t>
-            </a:r>
-            <a:pPr algn="l" indent="0" marL="0">
-              <a:lnSpc>
-                <a:spcPct val="145000"/>
-              </a:lnSpc>
-              <a:buNone/>
-            </a:pPr>
-            <a:r>
-              <a:rPr lang="en-US" sz="1125" dirty="0">
-                <a:solidFill>
-                  <a:srgbClr val="999999"/>
-                </a:solidFill>
-                <a:latin typeface="Inter" pitchFamily="34" charset="0"/>
-                <a:ea typeface="Inter" pitchFamily="34" charset="-122"/>
-                <a:cs typeface="Inter" pitchFamily="34" charset="-120"/>
-              </a:rPr>
-              <a:t>: drag it, zoom in, and the buildings rise as the day's scheduled services move across them.</a:t>
+              <a:t>This map is live. Drag it, zoom in, and the buildings rise as the day's scheduled services move across them.</a:t>
             </a:r>
             <a:endParaRPr lang="en-US" sz="1125" dirty="0"/>
           </a:p>
@@ -7918,7 +7884,7 @@
                 <a:ea typeface="Inter" pitchFamily="34" charset="-122"/>
                 <a:cs typeface="Inter" pitchFamily="34" charset="-120"/>
               </a:rPr>
-              <a:t>to everyday destinations — the single most direct lever.</a:t>
+              <a:t>to everyday destinations. The most direct lever there is.</a:t>
             </a:r>
             <a:endParaRPr lang="en-US" sz="1200" dirty="0"/>
           </a:p>
@@ -8764,7 +8730,7 @@
                 <a:ea typeface="Inter" pitchFamily="34" charset="-122"/>
                 <a:cs typeface="Inter" pitchFamily="34" charset="-120"/>
               </a:rPr>
-              <a:t>Danmarks Mobilitetsatlas is published under CC BY-SA 4.0 — screenshot it, quote it, build on it, with credit to Beta Mobility.</a:t>
+              <a:t>Danmarks Mobilitetsatlas is published under CC BY-SA 4.0. Screenshot it, quote it, build on it, with credit to Beta Mobility.</a:t>
             </a:r>
             <a:endParaRPr lang="en-US" sz="1125" dirty="0"/>
           </a:p>
@@ -8880,7 +8846,7 @@
                 <a:ea typeface="Playfair Display" pitchFamily="34" charset="-122"/>
                 <a:cs typeface="Playfair Display" pitchFamily="34" charset="-120"/>
               </a:rPr>
-              <a:t>Mobility is not routes. It is where you can get to.</a:t>
+              <a:t>Denmark has the network. The question is what it reaches.</a:t>
             </a:r>
             <a:endParaRPr lang="en-US" sz="3000" dirty="0"/>
           </a:p>
@@ -9238,7 +9204,7 @@
                 <a:ea typeface="Inter" pitchFamily="34" charset="-122"/>
                 <a:cs typeface="Inter" pitchFamily="34" charset="-120"/>
               </a:rPr>
-              <a:t>But a departure board is not access. What decides whether a car is a choice is how much of everyday life you can reach — work, groceries, school, health, social — in a reasonable travel time.</a:t>
+              <a:t>A departure board is not access. What decides whether a car is a choice is how much of everyday life you can reach in a reasonable travel time: work, groceries, school, health, social.</a:t>
             </a:r>
             <a:endParaRPr lang="en-US" sz="1650" dirty="0"/>
           </a:p>
@@ -9502,7 +9468,7 @@
                 <a:ea typeface="Inter" pitchFamily="34" charset="-122"/>
                 <a:cs typeface="Inter" pitchFamily="34" charset="-120"/>
               </a:rPr>
-              <a:t>Mobility freedom, 0 to 100, for every place in Denmark — then a letter.</a:t>
+              <a:t>Mobility freedom, 0 to 100, for every place in Denmark. Then a letter.</a:t>
             </a:r>
             <a:endParaRPr lang="en-US" sz="1800" dirty="0"/>
           </a:p>
@@ -11078,7 +11044,7 @@
                 <a:ea typeface="Inter" pitchFamily="34" charset="-122"/>
                 <a:cs typeface="Inter" pitchFamily="34" charset="-120"/>
               </a:rPr>
-              <a:t>In the lowest bands, walking and public transport cover only a small part of everyday life, and the car is in practice necessary — for everyone, including the people who cannot drive.</a:t>
+              <a:t>In the lowest bands, walking and public transport cover only a small part of everyday life. The car is in practice necessary, including for the people who cannot drive.</a:t>
             </a:r>
             <a:endParaRPr lang="en-US" sz="1650" dirty="0"/>
           </a:p>
@@ -11400,7 +11366,7 @@
                 <a:ea typeface="Inter" pitchFamily="34" charset="-122"/>
                 <a:cs typeface="Inter" pitchFamily="34" charset="-120"/>
               </a:rPr>
-              <a:t>Public-transport quality, population-weighted, by Statistics Denmark's municipal grouping.</a:t>
+              <a:t>Public transport quality, population-weighted, by Statistics Denmark's municipal grouping.</a:t>
             </a:r>
             <a:endParaRPr lang="en-US" sz="1575" dirty="0"/>
           </a:p>
@@ -11420,109 +11386,7 @@
                 <a:ea typeface="Inter" pitchFamily="34" charset="-122"/>
                 <a:cs typeface="Inter" pitchFamily="34" charset="-120"/>
               </a:rPr>
-              <a:t>The capital municipalities score </a:t>
-            </a:r>
-            <a:pPr algn="l" indent="0" marL="0">
-              <a:lnSpc>
-                <a:spcPct val="155000"/>
-              </a:lnSpc>
-              <a:buNone/>
-            </a:pPr>
-            <a:r>
-              <a:rPr lang="en-US" sz="1575" b="1" dirty="0">
-                <a:solidFill>
-                  <a:srgbClr val="1A1A1A"/>
-                </a:solidFill>
-                <a:latin typeface="Inter" pitchFamily="34" charset="0"/>
-                <a:ea typeface="Inter" pitchFamily="34" charset="-122"/>
-                <a:cs typeface="Inter" pitchFamily="34" charset="-120"/>
-              </a:rPr>
-              <a:t>80.1</a:t>
-            </a:r>
-            <a:pPr algn="l" indent="0" marL="0">
-              <a:lnSpc>
-                <a:spcPct val="155000"/>
-              </a:lnSpc>
-              <a:buNone/>
-            </a:pPr>
-            <a:r>
-              <a:rPr lang="en-US" sz="1575" dirty="0">
-                <a:solidFill>
-                  <a:srgbClr val="1A1A1A"/>
-                </a:solidFill>
-                <a:latin typeface="Inter" pitchFamily="34" charset="0"/>
-                <a:ea typeface="Inter" pitchFamily="34" charset="-122"/>
-                <a:cs typeface="Inter" pitchFamily="34" charset="-120"/>
-              </a:rPr>
-              <a:t>. The rural municipalities score </a:t>
-            </a:r>
-            <a:pPr algn="l" indent="0" marL="0">
-              <a:lnSpc>
-                <a:spcPct val="155000"/>
-              </a:lnSpc>
-              <a:buNone/>
-            </a:pPr>
-            <a:r>
-              <a:rPr lang="en-US" sz="1575" b="1" dirty="0">
-                <a:solidFill>
-                  <a:srgbClr val="1A1A1A"/>
-                </a:solidFill>
-                <a:latin typeface="Inter" pitchFamily="34" charset="0"/>
-                <a:ea typeface="Inter" pitchFamily="34" charset="-122"/>
-                <a:cs typeface="Inter" pitchFamily="34" charset="-120"/>
-              </a:rPr>
-              <a:t>25.2</a:t>
-            </a:r>
-            <a:pPr algn="l" indent="0" marL="0">
-              <a:lnSpc>
-                <a:spcPct val="155000"/>
-              </a:lnSpc>
-              <a:buNone/>
-            </a:pPr>
-            <a:r>
-              <a:rPr lang="en-US" sz="1575" dirty="0">
-                <a:solidFill>
-                  <a:srgbClr val="1A1A1A"/>
-                </a:solidFill>
-                <a:latin typeface="Inter" pitchFamily="34" charset="0"/>
-                <a:ea typeface="Inter" pitchFamily="34" charset="-122"/>
-                <a:cs typeface="Inter" pitchFamily="34" charset="-120"/>
-              </a:rPr>
-              <a:t> — a difference of </a:t>
-            </a:r>
-            <a:pPr algn="l" indent="0" marL="0">
-              <a:lnSpc>
-                <a:spcPct val="155000"/>
-              </a:lnSpc>
-              <a:buNone/>
-            </a:pPr>
-            <a:r>
-              <a:rPr lang="en-US" sz="1575" b="1" dirty="0">
-                <a:solidFill>
-                  <a:srgbClr val="1A1A1A"/>
-                </a:solidFill>
-                <a:latin typeface="Inter" pitchFamily="34" charset="0"/>
-                <a:ea typeface="Inter" pitchFamily="34" charset="-122"/>
-                <a:cs typeface="Inter" pitchFamily="34" charset="-120"/>
-              </a:rPr>
-              <a:t>3.2 times</a:t>
-            </a:r>
-            <a:pPr algn="l" indent="0" marL="0">
-              <a:lnSpc>
-                <a:spcPct val="155000"/>
-              </a:lnSpc>
-              <a:buNone/>
-            </a:pPr>
-            <a:r>
-              <a:rPr lang="en-US" sz="1575" dirty="0">
-                <a:solidFill>
-                  <a:srgbClr val="1A1A1A"/>
-                </a:solidFill>
-                <a:latin typeface="Inter" pitchFamily="34" charset="0"/>
-                <a:ea typeface="Inter" pitchFamily="34" charset="-122"/>
-                <a:cs typeface="Inter" pitchFamily="34" charset="-120"/>
-              </a:rPr>
-              <a:t>.</a:t>
+              <a:t>The capital municipalities score 80.1. The rural municipalities score 25.2. A difference of 3.2 times.</a:t>
             </a:r>
             <a:endParaRPr lang="en-US" sz="1575" dirty="0"/>
           </a:p>
@@ -11892,7 +11756,7 @@
                 <a:ea typeface="Inter" pitchFamily="34" charset="-122"/>
                 <a:cs typeface="Inter" pitchFamily="34" charset="-120"/>
               </a:rPr>
-              <a:t>Same method, same sources, every municipality — which is what makes the comparison fair.</a:t>
+              <a:t>Same method, same sources, every municipality. That is what makes the comparison fair.</a:t>
             </a:r>
             <a:endParaRPr lang="en-US" sz="1650" dirty="0"/>
           </a:p>
@@ -12510,7 +12374,7 @@
                 <a:ea typeface="Inter" pitchFamily="34" charset="-122"/>
                 <a:cs typeface="Inter" pitchFamily="34" charset="-120"/>
               </a:rPr>
-              <a:t>Public transport quality: how much of everyday life you reach without a car. Transport choice: how much further the car gets you.</a:t>
+              <a:t>Public transport quality is how much of everyday life you reach without a car. Transport choice is how much further the car gets you.</a:t>
             </a:r>
             <a:endParaRPr lang="en-US" sz="1125" dirty="0"/>
           </a:p>

--- a/decks/mobilitetsatlas-intro/Mobilitetsatlas-introduktion.pptx
+++ b/decks/mobilitetsatlas-intro/Mobilitetsatlas-introduktion.pptx
@@ -2299,7 +2299,7 @@
           <a:p>
             <a:r>
               <a:rPr lang="en-US" dirty="0"/>
-              <a:t>Danmarks Mobilitetsatlas gives every place in Denmark one comparable A–G grade for mobility. Twenty minutes: what the grade measures, how we calculate it, and what it says about your municipality. The map behind me is the 29 municipalities graded E, F or G.</a:t>
+              <a:t>Danmarks Mobilitetsatlas gives every place in Denmark one comparable A–G grade for mobility. Twenty minutes: what the grade measures, how we calculate it, and what it says about your municipality. The map behind me is the 29 municipalities graded E, F or G. Every figure in the deck is the published 0.4.0 edition of 22 August 2026, built on Rejseplanen GTFS (CC BY 4.0), OpenStreetMap and Danmarks Statistik. Full source list on mobilitetsatlas.dk/en/metode.</a:t>
             </a:r>
             <a:endParaRPr lang="en-US" dirty="0"/>
           </a:p>
@@ -2827,7 +2827,7 @@
           <a:p>
             <a:r>
               <a:rPr lang="en-US" dirty="0"/>
-              <a:t>Live as well. The horizontal axis is a dropdown: spending per resident, car ownership, population density, road casualties. The table underneath sorts on both measures. Worth opening in a browser tab when the room starts asking about one specific number.</a:t>
+              <a:t>The chart itself, live, so hovering a dot names the municipality. The horizontal axis is a dropdown: spending per resident, car ownership, population density, road casualties. The table underneath sorts on both measures. Worth opening in a browser tab when the room starts asking about one specific number.</a:t>
             </a:r>
             <a:endParaRPr lang="en-US" dirty="0"/>
           </a:p>
@@ -4215,27 +4215,7 @@
       </p:sp>
       <p:sp>
         <p:nvSpPr>
-          <p:cNvPr id="4" name="Shape 1"/>
-          <p:cNvSpPr/>
-          <p:nvPr/>
-        </p:nvSpPr>
-        <p:spPr>
-          <a:xfrm>
-            <a:off x="914400" y="2209830"/>
-            <a:ext cx="914400" cy="57150"/>
-          </a:xfrm>
-          <a:prstGeom prst="rect">
-            <a:avLst/>
-          </a:prstGeom>
-          <a:solidFill>
-            <a:srgbClr val="4A7C59"/>
-          </a:solidFill>
-          <a:ln/>
-        </p:spPr>
-      </p:sp>
-      <p:sp>
-        <p:nvSpPr>
-          <p:cNvPr id="5" name="Text 2"/>
+          <p:cNvPr id="4" name="Text 1"/>
           <p:cNvSpPr/>
           <p:nvPr/>
         </p:nvSpPr>
@@ -4263,7 +4243,7 @@
             <a:r>
               <a:rPr lang="en-US" sz="1050" spc="150" kern="0" dirty="0">
                 <a:solidFill>
-                  <a:srgbClr val="999999"/>
+                  <a:srgbClr val="F5F3EF"/>
                 </a:solidFill>
                 <a:latin typeface="DM Mono" pitchFamily="34" charset="0"/>
                 <a:ea typeface="DM Mono" pitchFamily="34" charset="-122"/>
@@ -4277,7 +4257,7 @@
       </p:sp>
       <p:sp>
         <p:nvSpPr>
-          <p:cNvPr id="6" name="Text 3"/>
+          <p:cNvPr id="5" name="Text 2"/>
           <p:cNvSpPr/>
           <p:nvPr/>
         </p:nvSpPr>
@@ -4339,7 +4319,7 @@
       </p:sp>
       <p:sp>
         <p:nvSpPr>
-          <p:cNvPr id="7" name="Text 4"/>
+          <p:cNvPr id="6" name="Text 3"/>
           <p:cNvSpPr/>
           <p:nvPr/>
         </p:nvSpPr>
@@ -4367,7 +4347,7 @@
             <a:r>
               <a:rPr lang="en-US" sz="1800" dirty="0">
                 <a:solidFill>
-                  <a:srgbClr val="999999"/>
+                  <a:srgbClr val="F5F3EF"/>
                 </a:solidFill>
                 <a:latin typeface="Inter" pitchFamily="34" charset="0"/>
                 <a:ea typeface="Inter" pitchFamily="34" charset="-122"/>
@@ -4381,7 +4361,7 @@
       </p:sp>
       <p:sp>
         <p:nvSpPr>
-          <p:cNvPr id="8" name="Text 5"/>
+          <p:cNvPr id="7" name="Text 4"/>
           <p:cNvSpPr/>
           <p:nvPr/>
         </p:nvSpPr>
@@ -4409,7 +4389,7 @@
             <a:r>
               <a:rPr lang="en-US" sz="975" dirty="0">
                 <a:solidFill>
-                  <a:srgbClr val="999999"/>
+                  <a:srgbClr val="F5F3EF"/>
                 </a:solidFill>
                 <a:latin typeface="DM Mono" pitchFamily="34" charset="0"/>
                 <a:ea typeface="DM Mono" pitchFamily="34" charset="-122"/>
@@ -4579,112 +4559,6 @@
           </a:p>
         </p:txBody>
       </p:sp>
-      <p:sp>
-        <p:nvSpPr>
-          <p:cNvPr id="5" name="Shape 3"/>
-          <p:cNvSpPr/>
-          <p:nvPr/>
-        </p:nvSpPr>
-        <p:spPr>
-          <a:xfrm>
-            <a:off x="914400" y="6096030"/>
-            <a:ext cx="10363170" cy="9510"/>
-          </a:xfrm>
-          <a:prstGeom prst="rect">
-            <a:avLst/>
-          </a:prstGeom>
-          <a:solidFill>
-            <a:srgbClr val="333333">
-              <a:alpha val="25000"/>
-            </a:srgbClr>
-          </a:solidFill>
-          <a:ln/>
-        </p:spPr>
-      </p:sp>
-      <p:sp>
-        <p:nvSpPr>
-          <p:cNvPr id="6" name="Text 4"/>
-          <p:cNvSpPr/>
-          <p:nvPr/>
-        </p:nvSpPr>
-        <p:spPr>
-          <a:xfrm>
-            <a:off x="914400" y="6210330"/>
-            <a:ext cx="5143500" cy="266730"/>
-          </a:xfrm>
-          <a:prstGeom prst="rect">
-            <a:avLst/>
-          </a:prstGeom>
-          <a:noFill/>
-          <a:ln/>
-        </p:spPr>
-        <p:txBody>
-          <a:bodyPr wrap="square" lIns="0" tIns="0" rIns="0" bIns="0" rtlCol="0" anchor="ctr"/>
-          <a:lstStyle/>
-          <a:p>
-            <a:pPr algn="l" indent="0" marL="0">
-              <a:lnSpc>
-                <a:spcPct val="130000"/>
-              </a:lnSpc>
-              <a:buNone/>
-            </a:pPr>
-            <a:r>
-              <a:rPr lang="en-US" sz="975" dirty="0">
-                <a:solidFill>
-                  <a:srgbClr val="999999"/>
-                </a:solidFill>
-                <a:latin typeface="DM Mono" pitchFamily="34" charset="0"/>
-                <a:ea typeface="DM Mono" pitchFamily="34" charset="-122"/>
-                <a:cs typeface="DM Mono" pitchFamily="34" charset="-120"/>
-              </a:rPr>
-              <a:t>Danmarks Mobilitetsatlas · Beta Mobility</a:t>
-            </a:r>
-            <a:endParaRPr lang="en-US" sz="975" dirty="0"/>
-          </a:p>
-        </p:txBody>
-      </p:sp>
-      <p:sp>
-        <p:nvSpPr>
-          <p:cNvPr id="7" name="Text 5"/>
-          <p:cNvSpPr/>
-          <p:nvPr/>
-        </p:nvSpPr>
-        <p:spPr>
-          <a:xfrm>
-            <a:off x="9372600" y="6210330"/>
-            <a:ext cx="1904970" cy="266730"/>
-          </a:xfrm>
-          <a:prstGeom prst="rect">
-            <a:avLst/>
-          </a:prstGeom>
-          <a:noFill/>
-          <a:ln/>
-        </p:spPr>
-        <p:txBody>
-          <a:bodyPr wrap="square" lIns="0" tIns="0" rIns="0" bIns="0" rtlCol="0" anchor="ctr"/>
-          <a:lstStyle/>
-          <a:p>
-            <a:pPr algn="r" indent="0" marL="0">
-              <a:lnSpc>
-                <a:spcPct val="130000"/>
-              </a:lnSpc>
-              <a:buNone/>
-            </a:pPr>
-            <a:r>
-              <a:rPr lang="en-US" sz="975" dirty="0">
-                <a:solidFill>
-                  <a:srgbClr val="999999"/>
-                </a:solidFill>
-                <a:latin typeface="DM Mono" pitchFamily="34" charset="0"/>
-                <a:ea typeface="DM Mono" pitchFamily="34" charset="-122"/>
-                <a:cs typeface="DM Mono" pitchFamily="34" charset="-120"/>
-              </a:rPr>
-              <a:t>09</a:t>
-            </a:r>
-            <a:endParaRPr lang="en-US" sz="975" dirty="0"/>
-          </a:p>
-        </p:txBody>
-      </p:sp>
     </p:spTree>
   </p:cSld>
   <p:clrMapOvr>
@@ -5715,154 +5589,6 @@
           </a:p>
         </p:txBody>
       </p:sp>
-      <p:sp>
-        <p:nvSpPr>
-          <p:cNvPr id="29" name="Text 27"/>
-          <p:cNvSpPr/>
-          <p:nvPr/>
-        </p:nvSpPr>
-        <p:spPr>
-          <a:xfrm>
-            <a:off x="914400" y="5753130"/>
-            <a:ext cx="10363170" cy="285750"/>
-          </a:xfrm>
-          <a:prstGeom prst="rect">
-            <a:avLst/>
-          </a:prstGeom>
-          <a:noFill/>
-          <a:ln/>
-        </p:spPr>
-        <p:txBody>
-          <a:bodyPr wrap="square" lIns="0" tIns="0" rIns="0" bIns="0" rtlCol="0" anchor="ctr"/>
-          <a:lstStyle/>
-          <a:p>
-            <a:pPr algn="l" indent="0" marL="0">
-              <a:lnSpc>
-                <a:spcPct val="130000"/>
-              </a:lnSpc>
-              <a:buNone/>
-            </a:pPr>
-            <a:r>
-              <a:rPr lang="en-US" sz="975" dirty="0">
-                <a:solidFill>
-                  <a:srgbClr val="666666"/>
-                </a:solidFill>
-                <a:latin typeface="DM Mono" pitchFamily="34" charset="0"/>
-                <a:ea typeface="DM Mono" pitchFamily="34" charset="-122"/>
-                <a:cs typeface="DM Mono" pitchFamily="34" charset="-120"/>
-              </a:rPr>
-              <a:t>Beta · Edition 0.4.0 · 22 August 2026 · Data as of 2026-09-09</a:t>
-            </a:r>
-            <a:endParaRPr lang="en-US" sz="975" dirty="0"/>
-          </a:p>
-        </p:txBody>
-      </p:sp>
-      <p:sp>
-        <p:nvSpPr>
-          <p:cNvPr id="30" name="Shape 28"/>
-          <p:cNvSpPr/>
-          <p:nvPr/>
-        </p:nvSpPr>
-        <p:spPr>
-          <a:xfrm>
-            <a:off x="914400" y="6096030"/>
-            <a:ext cx="10363170" cy="9510"/>
-          </a:xfrm>
-          <a:prstGeom prst="rect">
-            <a:avLst/>
-          </a:prstGeom>
-          <a:solidFill>
-            <a:srgbClr val="333333">
-              <a:alpha val="25000"/>
-            </a:srgbClr>
-          </a:solidFill>
-          <a:ln/>
-        </p:spPr>
-      </p:sp>
-      <p:sp>
-        <p:nvSpPr>
-          <p:cNvPr id="31" name="Text 29"/>
-          <p:cNvSpPr/>
-          <p:nvPr/>
-        </p:nvSpPr>
-        <p:spPr>
-          <a:xfrm>
-            <a:off x="914400" y="6210330"/>
-            <a:ext cx="5143500" cy="266730"/>
-          </a:xfrm>
-          <a:prstGeom prst="rect">
-            <a:avLst/>
-          </a:prstGeom>
-          <a:noFill/>
-          <a:ln/>
-        </p:spPr>
-        <p:txBody>
-          <a:bodyPr wrap="square" lIns="0" tIns="0" rIns="0" bIns="0" rtlCol="0" anchor="ctr"/>
-          <a:lstStyle/>
-          <a:p>
-            <a:pPr algn="l" indent="0" marL="0">
-              <a:lnSpc>
-                <a:spcPct val="130000"/>
-              </a:lnSpc>
-              <a:buNone/>
-            </a:pPr>
-            <a:r>
-              <a:rPr lang="en-US" sz="975" dirty="0">
-                <a:solidFill>
-                  <a:srgbClr val="666666"/>
-                </a:solidFill>
-                <a:latin typeface="DM Mono" pitchFamily="34" charset="0"/>
-                <a:ea typeface="DM Mono" pitchFamily="34" charset="-122"/>
-                <a:cs typeface="DM Mono" pitchFamily="34" charset="-120"/>
-              </a:rPr>
-              <a:t>Danmarks Mobilitetsatlas · Beta Mobility</a:t>
-            </a:r>
-            <a:endParaRPr lang="en-US" sz="975" dirty="0"/>
-          </a:p>
-        </p:txBody>
-      </p:sp>
-      <p:sp>
-        <p:nvSpPr>
-          <p:cNvPr id="32" name="Text 30"/>
-          <p:cNvSpPr/>
-          <p:nvPr/>
-        </p:nvSpPr>
-        <p:spPr>
-          <a:xfrm>
-            <a:off x="9372600" y="6210330"/>
-            <a:ext cx="1904970" cy="266730"/>
-          </a:xfrm>
-          <a:prstGeom prst="rect">
-            <a:avLst/>
-          </a:prstGeom>
-          <a:noFill/>
-          <a:ln/>
-        </p:spPr>
-        <p:txBody>
-          <a:bodyPr wrap="square" lIns="0" tIns="0" rIns="0" bIns="0" rtlCol="0" anchor="ctr"/>
-          <a:lstStyle/>
-          <a:p>
-            <a:pPr algn="r" indent="0" marL="0">
-              <a:lnSpc>
-                <a:spcPct val="130000"/>
-              </a:lnSpc>
-              <a:buNone/>
-            </a:pPr>
-            <a:r>
-              <a:rPr lang="en-US" sz="975" dirty="0">
-                <a:solidFill>
-                  <a:srgbClr val="666666"/>
-                </a:solidFill>
-                <a:latin typeface="DM Mono" pitchFamily="34" charset="0"/>
-                <a:ea typeface="DM Mono" pitchFamily="34" charset="-122"/>
-                <a:cs typeface="DM Mono" pitchFamily="34" charset="-120"/>
-              </a:rPr>
-              <a:t>10</a:t>
-            </a:r>
-            <a:endParaRPr lang="en-US" sz="975" dirty="0"/>
-          </a:p>
-        </p:txBody>
-      </p:sp>
     </p:spTree>
   </p:cSld>
   <p:clrMapOvr>
@@ -5973,7 +5699,7 @@
           </a:xfrm>
           <a:prstGeom prst="roundRect">
             <a:avLst>
-              <a:gd name="adj" fmla="val 18176"/>
+              <a:gd name="adj" fmla="val 50011"/>
             </a:avLst>
           </a:prstGeom>
           <a:solidFill>
@@ -5990,7 +5716,7 @@
         </p:nvSpPr>
         <p:spPr>
           <a:xfrm>
-            <a:off x="1104870" y="5867430"/>
+            <a:off x="1143000" y="5867430"/>
             <a:ext cx="3429000" cy="419070"/>
           </a:xfrm>
           <a:prstGeom prst="rect">
@@ -7257,7 +6983,7 @@
           </a:xfrm>
           <a:prstGeom prst="roundRect">
             <a:avLst>
-              <a:gd name="adj" fmla="val 18176"/>
+              <a:gd name="adj" fmla="val 50011"/>
             </a:avLst>
           </a:prstGeom>
           <a:solidFill>
@@ -7274,7 +7000,7 @@
         </p:nvSpPr>
         <p:spPr>
           <a:xfrm>
-            <a:off x="7658100" y="5410230"/>
+            <a:off x="7696230" y="5410230"/>
             <a:ext cx="3429000" cy="419070"/>
           </a:xfrm>
           <a:prstGeom prst="rect">
@@ -7305,48 +7031,6 @@
               <a:t>→  Every measure on the site</a:t>
             </a:r>
             <a:endParaRPr lang="en-US" sz="1125" dirty="0"/>
-          </a:p>
-        </p:txBody>
-      </p:sp>
-      <p:sp>
-        <p:nvSpPr>
-          <p:cNvPr id="10" name="Text 7"/>
-          <p:cNvSpPr/>
-          <p:nvPr/>
-        </p:nvSpPr>
-        <p:spPr>
-          <a:xfrm>
-            <a:off x="914400" y="5886450"/>
-            <a:ext cx="10363170" cy="285750"/>
-          </a:xfrm>
-          <a:prstGeom prst="rect">
-            <a:avLst/>
-          </a:prstGeom>
-          <a:noFill/>
-          <a:ln/>
-        </p:spPr>
-        <p:txBody>
-          <a:bodyPr wrap="square" lIns="0" tIns="0" rIns="0" bIns="0" rtlCol="0" anchor="ctr"/>
-          <a:lstStyle/>
-          <a:p>
-            <a:pPr algn="l" indent="0" marL="0">
-              <a:lnSpc>
-                <a:spcPct val="130000"/>
-              </a:lnSpc>
-              <a:buNone/>
-            </a:pPr>
-            <a:r>
-              <a:rPr lang="en-US" sz="975" dirty="0">
-                <a:solidFill>
-                  <a:srgbClr val="666666"/>
-                </a:solidFill>
-                <a:latin typeface="DM Mono" pitchFamily="34" charset="0"/>
-                <a:ea typeface="DM Mono" pitchFamily="34" charset="-122"/>
-                <a:cs typeface="DM Mono" pitchFamily="34" charset="-120"/>
-              </a:rPr>
-              <a:t>Beta · DST families with a car, 2026 · Edition 0.4.0 · 22 August 2026 · Data as of 2026-09-09</a:t>
-            </a:r>
-            <a:endParaRPr lang="en-US" sz="975" dirty="0"/>
           </a:p>
         </p:txBody>
       </p:sp>
@@ -7483,7 +7167,7 @@
                 <a:ea typeface="DM Mono" pitchFamily="34" charset="-122"/>
                 <a:cs typeface="DM Mono" pitchFamily="34" charset="-120"/>
               </a:rPr>
-              <a:t>mobilitetsatlas.dk/en/udforsk  ·  ←  back</a:t>
+              <a:t>mobilitetsatlas.dk/en/udforsk  ·  hover a dot for the municipality  ·  ←  back</a:t>
             </a:r>
             <a:endParaRPr lang="en-US" sz="975" dirty="0"/>
           </a:p>
@@ -7644,7 +7328,7 @@
                 <a:ea typeface="Inter" pitchFamily="34" charset="-122"/>
                 <a:cs typeface="Inter" pitchFamily="34" charset="-120"/>
               </a:rPr>
-              <a:t>This map is live. Drag it, zoom in, and the buildings rise as the day's scheduled services move across them.</a:t>
+              <a:t>Live, and already at street level. Drag it, and the day's scheduled services keep moving across the buildings.</a:t>
             </a:r>
             <a:endParaRPr lang="en-US" sz="1125" dirty="0"/>
           </a:p>
@@ -8410,154 +8094,6 @@
           </a:p>
         </p:txBody>
       </p:sp>
-      <p:sp>
-        <p:nvSpPr>
-          <p:cNvPr id="21" name="Text 19"/>
-          <p:cNvSpPr/>
-          <p:nvPr/>
-        </p:nvSpPr>
-        <p:spPr>
-          <a:xfrm>
-            <a:off x="914400" y="5753130"/>
-            <a:ext cx="10363170" cy="285750"/>
-          </a:xfrm>
-          <a:prstGeom prst="rect">
-            <a:avLst/>
-          </a:prstGeom>
-          <a:noFill/>
-          <a:ln/>
-        </p:spPr>
-        <p:txBody>
-          <a:bodyPr wrap="square" lIns="0" tIns="0" rIns="0" bIns="0" rtlCol="0" anchor="ctr"/>
-          <a:lstStyle/>
-          <a:p>
-            <a:pPr algn="l" indent="0" marL="0">
-              <a:lnSpc>
-                <a:spcPct val="130000"/>
-              </a:lnSpc>
-              <a:buNone/>
-            </a:pPr>
-            <a:r>
-              <a:rPr lang="en-US" sz="975" dirty="0">
-                <a:solidFill>
-                  <a:srgbClr val="666666"/>
-                </a:solidFill>
-                <a:latin typeface="DM Mono" pitchFamily="34" charset="0"/>
-                <a:ea typeface="DM Mono" pitchFamily="34" charset="-122"/>
-                <a:cs typeface="DM Mono" pitchFamily="34" charset="-120"/>
-              </a:rPr>
-              <a:t>Beta · mobilitetsatlas.dk/en/metode</a:t>
-            </a:r>
-            <a:endParaRPr lang="en-US" sz="975" dirty="0"/>
-          </a:p>
-        </p:txBody>
-      </p:sp>
-      <p:sp>
-        <p:nvSpPr>
-          <p:cNvPr id="22" name="Shape 20"/>
-          <p:cNvSpPr/>
-          <p:nvPr/>
-        </p:nvSpPr>
-        <p:spPr>
-          <a:xfrm>
-            <a:off x="914400" y="6096030"/>
-            <a:ext cx="10363170" cy="9510"/>
-          </a:xfrm>
-          <a:prstGeom prst="rect">
-            <a:avLst/>
-          </a:prstGeom>
-          <a:solidFill>
-            <a:srgbClr val="333333">
-              <a:alpha val="25000"/>
-            </a:srgbClr>
-          </a:solidFill>
-          <a:ln/>
-        </p:spPr>
-      </p:sp>
-      <p:sp>
-        <p:nvSpPr>
-          <p:cNvPr id="23" name="Text 21"/>
-          <p:cNvSpPr/>
-          <p:nvPr/>
-        </p:nvSpPr>
-        <p:spPr>
-          <a:xfrm>
-            <a:off x="914400" y="6210330"/>
-            <a:ext cx="5143500" cy="266730"/>
-          </a:xfrm>
-          <a:prstGeom prst="rect">
-            <a:avLst/>
-          </a:prstGeom>
-          <a:noFill/>
-          <a:ln/>
-        </p:spPr>
-        <p:txBody>
-          <a:bodyPr wrap="square" lIns="0" tIns="0" rIns="0" bIns="0" rtlCol="0" anchor="ctr"/>
-          <a:lstStyle/>
-          <a:p>
-            <a:pPr algn="l" indent="0" marL="0">
-              <a:lnSpc>
-                <a:spcPct val="130000"/>
-              </a:lnSpc>
-              <a:buNone/>
-            </a:pPr>
-            <a:r>
-              <a:rPr lang="en-US" sz="975" dirty="0">
-                <a:solidFill>
-                  <a:srgbClr val="666666"/>
-                </a:solidFill>
-                <a:latin typeface="DM Mono" pitchFamily="34" charset="0"/>
-                <a:ea typeface="DM Mono" pitchFamily="34" charset="-122"/>
-                <a:cs typeface="DM Mono" pitchFamily="34" charset="-120"/>
-              </a:rPr>
-              <a:t>Danmarks Mobilitetsatlas · Beta Mobility</a:t>
-            </a:r>
-            <a:endParaRPr lang="en-US" sz="975" dirty="0"/>
-          </a:p>
-        </p:txBody>
-      </p:sp>
-      <p:sp>
-        <p:nvSpPr>
-          <p:cNvPr id="24" name="Text 22"/>
-          <p:cNvSpPr/>
-          <p:nvPr/>
-        </p:nvSpPr>
-        <p:spPr>
-          <a:xfrm>
-            <a:off x="9372600" y="6210330"/>
-            <a:ext cx="1904970" cy="266730"/>
-          </a:xfrm>
-          <a:prstGeom prst="rect">
-            <a:avLst/>
-          </a:prstGeom>
-          <a:noFill/>
-          <a:ln/>
-        </p:spPr>
-        <p:txBody>
-          <a:bodyPr wrap="square" lIns="0" tIns="0" rIns="0" bIns="0" rtlCol="0" anchor="ctr"/>
-          <a:lstStyle/>
-          <a:p>
-            <a:pPr algn="r" indent="0" marL="0">
-              <a:lnSpc>
-                <a:spcPct val="130000"/>
-              </a:lnSpc>
-              <a:buNone/>
-            </a:pPr>
-            <a:r>
-              <a:rPr lang="en-US" sz="975" dirty="0">
-                <a:solidFill>
-                  <a:srgbClr val="666666"/>
-                </a:solidFill>
-                <a:latin typeface="DM Mono" pitchFamily="34" charset="0"/>
-                <a:ea typeface="DM Mono" pitchFamily="34" charset="-122"/>
-                <a:cs typeface="DM Mono" pitchFamily="34" charset="-120"/>
-              </a:rPr>
-              <a:t>14</a:t>
-            </a:r>
-            <a:endParaRPr lang="en-US" sz="975" dirty="0"/>
-          </a:p>
-        </p:txBody>
-      </p:sp>
     </p:spTree>
   </p:cSld>
   <p:clrMapOvr>
@@ -9210,154 +8746,6 @@
           </a:p>
         </p:txBody>
       </p:sp>
-      <p:sp>
-        <p:nvSpPr>
-          <p:cNvPr id="12" name="Text 10"/>
-          <p:cNvSpPr/>
-          <p:nvPr/>
-        </p:nvSpPr>
-        <p:spPr>
-          <a:xfrm>
-            <a:off x="914400" y="5676870"/>
-            <a:ext cx="10363170" cy="285750"/>
-          </a:xfrm>
-          <a:prstGeom prst="rect">
-            <a:avLst/>
-          </a:prstGeom>
-          <a:noFill/>
-          <a:ln/>
-        </p:spPr>
-        <p:txBody>
-          <a:bodyPr wrap="square" lIns="0" tIns="0" rIns="0" bIns="0" rtlCol="0" anchor="ctr"/>
-          <a:lstStyle/>
-          <a:p>
-            <a:pPr algn="l" indent="0" marL="0">
-              <a:lnSpc>
-                <a:spcPct val="130000"/>
-              </a:lnSpc>
-              <a:buNone/>
-            </a:pPr>
-            <a:r>
-              <a:rPr lang="en-US" sz="975" dirty="0">
-                <a:solidFill>
-                  <a:srgbClr val="666666"/>
-                </a:solidFill>
-                <a:latin typeface="DM Mono" pitchFamily="34" charset="0"/>
-                <a:ea typeface="DM Mono" pitchFamily="34" charset="-122"/>
-                <a:cs typeface="DM Mono" pitchFamily="34" charset="-120"/>
-              </a:rPr>
-              <a:t>Beta · Rejseplanen GTFS (CC BY 4.0) · Data as of 2026-09-09</a:t>
-            </a:r>
-            <a:endParaRPr lang="en-US" sz="975" dirty="0"/>
-          </a:p>
-        </p:txBody>
-      </p:sp>
-      <p:sp>
-        <p:nvSpPr>
-          <p:cNvPr id="13" name="Shape 11"/>
-          <p:cNvSpPr/>
-          <p:nvPr/>
-        </p:nvSpPr>
-        <p:spPr>
-          <a:xfrm>
-            <a:off x="914400" y="6096030"/>
-            <a:ext cx="10363170" cy="9510"/>
-          </a:xfrm>
-          <a:prstGeom prst="rect">
-            <a:avLst/>
-          </a:prstGeom>
-          <a:solidFill>
-            <a:srgbClr val="333333">
-              <a:alpha val="25000"/>
-            </a:srgbClr>
-          </a:solidFill>
-          <a:ln/>
-        </p:spPr>
-      </p:sp>
-      <p:sp>
-        <p:nvSpPr>
-          <p:cNvPr id="14" name="Text 12"/>
-          <p:cNvSpPr/>
-          <p:nvPr/>
-        </p:nvSpPr>
-        <p:spPr>
-          <a:xfrm>
-            <a:off x="914400" y="6210330"/>
-            <a:ext cx="5143500" cy="266730"/>
-          </a:xfrm>
-          <a:prstGeom prst="rect">
-            <a:avLst/>
-          </a:prstGeom>
-          <a:noFill/>
-          <a:ln/>
-        </p:spPr>
-        <p:txBody>
-          <a:bodyPr wrap="square" lIns="0" tIns="0" rIns="0" bIns="0" rtlCol="0" anchor="ctr"/>
-          <a:lstStyle/>
-          <a:p>
-            <a:pPr algn="l" indent="0" marL="0">
-              <a:lnSpc>
-                <a:spcPct val="130000"/>
-              </a:lnSpc>
-              <a:buNone/>
-            </a:pPr>
-            <a:r>
-              <a:rPr lang="en-US" sz="975" dirty="0">
-                <a:solidFill>
-                  <a:srgbClr val="666666"/>
-                </a:solidFill>
-                <a:latin typeface="DM Mono" pitchFamily="34" charset="0"/>
-                <a:ea typeface="DM Mono" pitchFamily="34" charset="-122"/>
-                <a:cs typeface="DM Mono" pitchFamily="34" charset="-120"/>
-              </a:rPr>
-              <a:t>Danmarks Mobilitetsatlas · Beta Mobility</a:t>
-            </a:r>
-            <a:endParaRPr lang="en-US" sz="975" dirty="0"/>
-          </a:p>
-        </p:txBody>
-      </p:sp>
-      <p:sp>
-        <p:nvSpPr>
-          <p:cNvPr id="15" name="Text 13"/>
-          <p:cNvSpPr/>
-          <p:nvPr/>
-        </p:nvSpPr>
-        <p:spPr>
-          <a:xfrm>
-            <a:off x="9372600" y="6210330"/>
-            <a:ext cx="1904970" cy="266730"/>
-          </a:xfrm>
-          <a:prstGeom prst="rect">
-            <a:avLst/>
-          </a:prstGeom>
-          <a:noFill/>
-          <a:ln/>
-        </p:spPr>
-        <p:txBody>
-          <a:bodyPr wrap="square" lIns="0" tIns="0" rIns="0" bIns="0" rtlCol="0" anchor="ctr"/>
-          <a:lstStyle/>
-          <a:p>
-            <a:pPr algn="r" indent="0" marL="0">
-              <a:lnSpc>
-                <a:spcPct val="130000"/>
-              </a:lnSpc>
-              <a:buNone/>
-            </a:pPr>
-            <a:r>
-              <a:rPr lang="en-US" sz="975" dirty="0">
-                <a:solidFill>
-                  <a:srgbClr val="666666"/>
-                </a:solidFill>
-                <a:latin typeface="DM Mono" pitchFamily="34" charset="0"/>
-                <a:ea typeface="DM Mono" pitchFamily="34" charset="-122"/>
-                <a:cs typeface="DM Mono" pitchFamily="34" charset="-120"/>
-              </a:rPr>
-              <a:t>02</a:t>
-            </a:r>
-            <a:endParaRPr lang="en-US" sz="975" dirty="0"/>
-          </a:p>
-        </p:txBody>
-      </p:sp>
     </p:spTree>
   </p:cSld>
   <p:clrMapOvr>
@@ -10070,154 +9458,6 @@
           </a:p>
         </p:txBody>
       </p:sp>
-      <p:sp>
-        <p:nvSpPr>
-          <p:cNvPr id="22" name="Text 20"/>
-          <p:cNvSpPr/>
-          <p:nvPr/>
-        </p:nvSpPr>
-        <p:spPr>
-          <a:xfrm>
-            <a:off x="914400" y="5429250"/>
-            <a:ext cx="10363170" cy="285750"/>
-          </a:xfrm>
-          <a:prstGeom prst="rect">
-            <a:avLst/>
-          </a:prstGeom>
-          <a:noFill/>
-          <a:ln/>
-        </p:spPr>
-        <p:txBody>
-          <a:bodyPr wrap="square" lIns="0" tIns="0" rIns="0" bIns="0" rtlCol="0" anchor="ctr"/>
-          <a:lstStyle/>
-          <a:p>
-            <a:pPr algn="l" indent="0" marL="0">
-              <a:lnSpc>
-                <a:spcPct val="130000"/>
-              </a:lnSpc>
-              <a:buNone/>
-            </a:pPr>
-            <a:r>
-              <a:rPr lang="en-US" sz="975" dirty="0">
-                <a:solidFill>
-                  <a:srgbClr val="666666"/>
-                </a:solidFill>
-                <a:latin typeface="DM Mono" pitchFamily="34" charset="0"/>
-                <a:ea typeface="DM Mono" pitchFamily="34" charset="-122"/>
-                <a:cs typeface="DM Mono" pitchFamily="34" charset="-120"/>
-              </a:rPr>
-              <a:t>Beta · Danmarks Mobilitetsatlas · Edition 0.4.0 · 22 August 2026</a:t>
-            </a:r>
-            <a:endParaRPr lang="en-US" sz="975" dirty="0"/>
-          </a:p>
-        </p:txBody>
-      </p:sp>
-      <p:sp>
-        <p:nvSpPr>
-          <p:cNvPr id="23" name="Shape 21"/>
-          <p:cNvSpPr/>
-          <p:nvPr/>
-        </p:nvSpPr>
-        <p:spPr>
-          <a:xfrm>
-            <a:off x="914400" y="6096030"/>
-            <a:ext cx="10363170" cy="9510"/>
-          </a:xfrm>
-          <a:prstGeom prst="rect">
-            <a:avLst/>
-          </a:prstGeom>
-          <a:solidFill>
-            <a:srgbClr val="333333">
-              <a:alpha val="25000"/>
-            </a:srgbClr>
-          </a:solidFill>
-          <a:ln/>
-        </p:spPr>
-      </p:sp>
-      <p:sp>
-        <p:nvSpPr>
-          <p:cNvPr id="24" name="Text 22"/>
-          <p:cNvSpPr/>
-          <p:nvPr/>
-        </p:nvSpPr>
-        <p:spPr>
-          <a:xfrm>
-            <a:off x="914400" y="6210330"/>
-            <a:ext cx="5143500" cy="266730"/>
-          </a:xfrm>
-          <a:prstGeom prst="rect">
-            <a:avLst/>
-          </a:prstGeom>
-          <a:noFill/>
-          <a:ln/>
-        </p:spPr>
-        <p:txBody>
-          <a:bodyPr wrap="square" lIns="0" tIns="0" rIns="0" bIns="0" rtlCol="0" anchor="ctr"/>
-          <a:lstStyle/>
-          <a:p>
-            <a:pPr algn="l" indent="0" marL="0">
-              <a:lnSpc>
-                <a:spcPct val="130000"/>
-              </a:lnSpc>
-              <a:buNone/>
-            </a:pPr>
-            <a:r>
-              <a:rPr lang="en-US" sz="975" dirty="0">
-                <a:solidFill>
-                  <a:srgbClr val="666666"/>
-                </a:solidFill>
-                <a:latin typeface="DM Mono" pitchFamily="34" charset="0"/>
-                <a:ea typeface="DM Mono" pitchFamily="34" charset="-122"/>
-                <a:cs typeface="DM Mono" pitchFamily="34" charset="-120"/>
-              </a:rPr>
-              <a:t>Danmarks Mobilitetsatlas · Beta Mobility</a:t>
-            </a:r>
-            <a:endParaRPr lang="en-US" sz="975" dirty="0"/>
-          </a:p>
-        </p:txBody>
-      </p:sp>
-      <p:sp>
-        <p:nvSpPr>
-          <p:cNvPr id="25" name="Text 23"/>
-          <p:cNvSpPr/>
-          <p:nvPr/>
-        </p:nvSpPr>
-        <p:spPr>
-          <a:xfrm>
-            <a:off x="9372600" y="6210330"/>
-            <a:ext cx="1904970" cy="266730"/>
-          </a:xfrm>
-          <a:prstGeom prst="rect">
-            <a:avLst/>
-          </a:prstGeom>
-          <a:noFill/>
-          <a:ln/>
-        </p:spPr>
-        <p:txBody>
-          <a:bodyPr wrap="square" lIns="0" tIns="0" rIns="0" bIns="0" rtlCol="0" anchor="ctr"/>
-          <a:lstStyle/>
-          <a:p>
-            <a:pPr algn="r" indent="0" marL="0">
-              <a:lnSpc>
-                <a:spcPct val="130000"/>
-              </a:lnSpc>
-              <a:buNone/>
-            </a:pPr>
-            <a:r>
-              <a:rPr lang="en-US" sz="975" dirty="0">
-                <a:solidFill>
-                  <a:srgbClr val="666666"/>
-                </a:solidFill>
-                <a:latin typeface="DM Mono" pitchFamily="34" charset="0"/>
-                <a:ea typeface="DM Mono" pitchFamily="34" charset="-122"/>
-                <a:cs typeface="DM Mono" pitchFamily="34" charset="-120"/>
-              </a:rPr>
-              <a:t>03</a:t>
-            </a:r>
-            <a:endParaRPr lang="en-US" sz="975" dirty="0"/>
-          </a:p>
-        </p:txBody>
-      </p:sp>
     </p:spTree>
   </p:cSld>
   <p:clrMapOvr>
@@ -11050,154 +10290,6 @@
           </a:p>
         </p:txBody>
       </p:sp>
-      <p:sp>
-        <p:nvSpPr>
-          <p:cNvPr id="24" name="Text 22"/>
-          <p:cNvSpPr/>
-          <p:nvPr/>
-        </p:nvSpPr>
-        <p:spPr>
-          <a:xfrm>
-            <a:off x="914400" y="5581680"/>
-            <a:ext cx="10363170" cy="285750"/>
-          </a:xfrm>
-          <a:prstGeom prst="rect">
-            <a:avLst/>
-          </a:prstGeom>
-          <a:noFill/>
-          <a:ln/>
-        </p:spPr>
-        <p:txBody>
-          <a:bodyPr wrap="square" lIns="0" tIns="0" rIns="0" bIns="0" rtlCol="0" anchor="ctr"/>
-          <a:lstStyle/>
-          <a:p>
-            <a:pPr algn="l" indent="0" marL="0">
-              <a:lnSpc>
-                <a:spcPct val="130000"/>
-              </a:lnSpc>
-              <a:buNone/>
-            </a:pPr>
-            <a:r>
-              <a:rPr lang="en-US" sz="975" dirty="0">
-                <a:solidFill>
-                  <a:srgbClr val="666666"/>
-                </a:solidFill>
-                <a:latin typeface="DM Mono" pitchFamily="34" charset="0"/>
-                <a:ea typeface="DM Mono" pitchFamily="34" charset="-122"/>
-                <a:cs typeface="DM Mono" pitchFamily="34" charset="-120"/>
-              </a:rPr>
-              <a:t>Beta · league table, Edition 0.4.0 · 22 August 2026 · Data as of 2026-09-09</a:t>
-            </a:r>
-            <a:endParaRPr lang="en-US" sz="975" dirty="0"/>
-          </a:p>
-        </p:txBody>
-      </p:sp>
-      <p:sp>
-        <p:nvSpPr>
-          <p:cNvPr id="25" name="Shape 23"/>
-          <p:cNvSpPr/>
-          <p:nvPr/>
-        </p:nvSpPr>
-        <p:spPr>
-          <a:xfrm>
-            <a:off x="914400" y="6096030"/>
-            <a:ext cx="10363170" cy="9510"/>
-          </a:xfrm>
-          <a:prstGeom prst="rect">
-            <a:avLst/>
-          </a:prstGeom>
-          <a:solidFill>
-            <a:srgbClr val="333333">
-              <a:alpha val="25000"/>
-            </a:srgbClr>
-          </a:solidFill>
-          <a:ln/>
-        </p:spPr>
-      </p:sp>
-      <p:sp>
-        <p:nvSpPr>
-          <p:cNvPr id="26" name="Text 24"/>
-          <p:cNvSpPr/>
-          <p:nvPr/>
-        </p:nvSpPr>
-        <p:spPr>
-          <a:xfrm>
-            <a:off x="914400" y="6210330"/>
-            <a:ext cx="5143500" cy="266730"/>
-          </a:xfrm>
-          <a:prstGeom prst="rect">
-            <a:avLst/>
-          </a:prstGeom>
-          <a:noFill/>
-          <a:ln/>
-        </p:spPr>
-        <p:txBody>
-          <a:bodyPr wrap="square" lIns="0" tIns="0" rIns="0" bIns="0" rtlCol="0" anchor="ctr"/>
-          <a:lstStyle/>
-          <a:p>
-            <a:pPr algn="l" indent="0" marL="0">
-              <a:lnSpc>
-                <a:spcPct val="130000"/>
-              </a:lnSpc>
-              <a:buNone/>
-            </a:pPr>
-            <a:r>
-              <a:rPr lang="en-US" sz="975" dirty="0">
-                <a:solidFill>
-                  <a:srgbClr val="666666"/>
-                </a:solidFill>
-                <a:latin typeface="DM Mono" pitchFamily="34" charset="0"/>
-                <a:ea typeface="DM Mono" pitchFamily="34" charset="-122"/>
-                <a:cs typeface="DM Mono" pitchFamily="34" charset="-120"/>
-              </a:rPr>
-              <a:t>Danmarks Mobilitetsatlas · Beta Mobility</a:t>
-            </a:r>
-            <a:endParaRPr lang="en-US" sz="975" dirty="0"/>
-          </a:p>
-        </p:txBody>
-      </p:sp>
-      <p:sp>
-        <p:nvSpPr>
-          <p:cNvPr id="27" name="Text 25"/>
-          <p:cNvSpPr/>
-          <p:nvPr/>
-        </p:nvSpPr>
-        <p:spPr>
-          <a:xfrm>
-            <a:off x="9372600" y="6210330"/>
-            <a:ext cx="1904970" cy="266730"/>
-          </a:xfrm>
-          <a:prstGeom prst="rect">
-            <a:avLst/>
-          </a:prstGeom>
-          <a:noFill/>
-          <a:ln/>
-        </p:spPr>
-        <p:txBody>
-          <a:bodyPr wrap="square" lIns="0" tIns="0" rIns="0" bIns="0" rtlCol="0" anchor="ctr"/>
-          <a:lstStyle/>
-          <a:p>
-            <a:pPr algn="r" indent="0" marL="0">
-              <a:lnSpc>
-                <a:spcPct val="130000"/>
-              </a:lnSpc>
-              <a:buNone/>
-            </a:pPr>
-            <a:r>
-              <a:rPr lang="en-US" sz="975" dirty="0">
-                <a:solidFill>
-                  <a:srgbClr val="666666"/>
-                </a:solidFill>
-                <a:latin typeface="DM Mono" pitchFamily="34" charset="0"/>
-                <a:ea typeface="DM Mono" pitchFamily="34" charset="-122"/>
-                <a:cs typeface="DM Mono" pitchFamily="34" charset="-120"/>
-              </a:rPr>
-              <a:t>04</a:t>
-            </a:r>
-            <a:endParaRPr lang="en-US" sz="975" dirty="0"/>
-          </a:p>
-        </p:txBody>
-      </p:sp>
     </p:spTree>
   </p:cSld>
   <p:clrMapOvr>
@@ -11456,154 +10548,6 @@
           </a:p>
         </p:txBody>
       </p:sp>
-      <p:sp>
-        <p:nvSpPr>
-          <p:cNvPr id="8" name="Text 5"/>
-          <p:cNvSpPr/>
-          <p:nvPr/>
-        </p:nvSpPr>
-        <p:spPr>
-          <a:xfrm>
-            <a:off x="7162770" y="5676870"/>
-            <a:ext cx="4114800" cy="285750"/>
-          </a:xfrm>
-          <a:prstGeom prst="rect">
-            <a:avLst/>
-          </a:prstGeom>
-          <a:noFill/>
-          <a:ln/>
-        </p:spPr>
-        <p:txBody>
-          <a:bodyPr wrap="square" lIns="0" tIns="0" rIns="0" bIns="0" rtlCol="0" anchor="ctr"/>
-          <a:lstStyle/>
-          <a:p>
-            <a:pPr algn="l" indent="0" marL="0">
-              <a:lnSpc>
-                <a:spcPct val="130000"/>
-              </a:lnSpc>
-              <a:buNone/>
-            </a:pPr>
-            <a:r>
-              <a:rPr lang="en-US" sz="975" dirty="0">
-                <a:solidFill>
-                  <a:srgbClr val="666666"/>
-                </a:solidFill>
-                <a:latin typeface="DM Mono" pitchFamily="34" charset="0"/>
-                <a:ea typeface="DM Mono" pitchFamily="34" charset="-122"/>
-                <a:cs typeface="DM Mono" pitchFamily="34" charset="-120"/>
-              </a:rPr>
-              <a:t>DST grouping 2018 · Edition 0.4.0 · 22 August 2026</a:t>
-            </a:r>
-            <a:endParaRPr lang="en-US" sz="975" dirty="0"/>
-          </a:p>
-        </p:txBody>
-      </p:sp>
-      <p:sp>
-        <p:nvSpPr>
-          <p:cNvPr id="9" name="Shape 6"/>
-          <p:cNvSpPr/>
-          <p:nvPr/>
-        </p:nvSpPr>
-        <p:spPr>
-          <a:xfrm>
-            <a:off x="914400" y="6096030"/>
-            <a:ext cx="10363170" cy="9510"/>
-          </a:xfrm>
-          <a:prstGeom prst="rect">
-            <a:avLst/>
-          </a:prstGeom>
-          <a:solidFill>
-            <a:srgbClr val="333333">
-              <a:alpha val="25000"/>
-            </a:srgbClr>
-          </a:solidFill>
-          <a:ln/>
-        </p:spPr>
-      </p:sp>
-      <p:sp>
-        <p:nvSpPr>
-          <p:cNvPr id="10" name="Text 7"/>
-          <p:cNvSpPr/>
-          <p:nvPr/>
-        </p:nvSpPr>
-        <p:spPr>
-          <a:xfrm>
-            <a:off x="914400" y="6210330"/>
-            <a:ext cx="5143500" cy="266730"/>
-          </a:xfrm>
-          <a:prstGeom prst="rect">
-            <a:avLst/>
-          </a:prstGeom>
-          <a:noFill/>
-          <a:ln/>
-        </p:spPr>
-        <p:txBody>
-          <a:bodyPr wrap="square" lIns="0" tIns="0" rIns="0" bIns="0" rtlCol="0" anchor="ctr"/>
-          <a:lstStyle/>
-          <a:p>
-            <a:pPr algn="l" indent="0" marL="0">
-              <a:lnSpc>
-                <a:spcPct val="130000"/>
-              </a:lnSpc>
-              <a:buNone/>
-            </a:pPr>
-            <a:r>
-              <a:rPr lang="en-US" sz="975" dirty="0">
-                <a:solidFill>
-                  <a:srgbClr val="666666"/>
-                </a:solidFill>
-                <a:latin typeface="DM Mono" pitchFamily="34" charset="0"/>
-                <a:ea typeface="DM Mono" pitchFamily="34" charset="-122"/>
-                <a:cs typeface="DM Mono" pitchFamily="34" charset="-120"/>
-              </a:rPr>
-              <a:t>Danmarks Mobilitetsatlas · Beta Mobility</a:t>
-            </a:r>
-            <a:endParaRPr lang="en-US" sz="975" dirty="0"/>
-          </a:p>
-        </p:txBody>
-      </p:sp>
-      <p:sp>
-        <p:nvSpPr>
-          <p:cNvPr id="11" name="Text 8"/>
-          <p:cNvSpPr/>
-          <p:nvPr/>
-        </p:nvSpPr>
-        <p:spPr>
-          <a:xfrm>
-            <a:off x="9372600" y="6210330"/>
-            <a:ext cx="1904970" cy="266730"/>
-          </a:xfrm>
-          <a:prstGeom prst="rect">
-            <a:avLst/>
-          </a:prstGeom>
-          <a:noFill/>
-          <a:ln/>
-        </p:spPr>
-        <p:txBody>
-          <a:bodyPr wrap="square" lIns="0" tIns="0" rIns="0" bIns="0" rtlCol="0" anchor="ctr"/>
-          <a:lstStyle/>
-          <a:p>
-            <a:pPr algn="r" indent="0" marL="0">
-              <a:lnSpc>
-                <a:spcPct val="130000"/>
-              </a:lnSpc>
-              <a:buNone/>
-            </a:pPr>
-            <a:r>
-              <a:rPr lang="en-US" sz="975" dirty="0">
-                <a:solidFill>
-                  <a:srgbClr val="666666"/>
-                </a:solidFill>
-                <a:latin typeface="DM Mono" pitchFamily="34" charset="0"/>
-                <a:ea typeface="DM Mono" pitchFamily="34" charset="-122"/>
-                <a:cs typeface="DM Mono" pitchFamily="34" charset="-120"/>
-              </a:rPr>
-              <a:t>05</a:t>
-            </a:r>
-            <a:endParaRPr lang="en-US" sz="975" dirty="0"/>
-          </a:p>
-        </p:txBody>
-      </p:sp>
     </p:spTree>
   </p:cSld>
   <p:clrMapOvr>
@@ -11762,112 +10706,6 @@
           </a:p>
         </p:txBody>
       </p:sp>
-      <p:sp>
-        <p:nvSpPr>
-          <p:cNvPr id="5" name="Shape 3"/>
-          <p:cNvSpPr/>
-          <p:nvPr/>
-        </p:nvSpPr>
-        <p:spPr>
-          <a:xfrm>
-            <a:off x="914400" y="6096030"/>
-            <a:ext cx="10363170" cy="9510"/>
-          </a:xfrm>
-          <a:prstGeom prst="rect">
-            <a:avLst/>
-          </a:prstGeom>
-          <a:solidFill>
-            <a:srgbClr val="333333">
-              <a:alpha val="25000"/>
-            </a:srgbClr>
-          </a:solidFill>
-          <a:ln/>
-        </p:spPr>
-      </p:sp>
-      <p:sp>
-        <p:nvSpPr>
-          <p:cNvPr id="6" name="Text 4"/>
-          <p:cNvSpPr/>
-          <p:nvPr/>
-        </p:nvSpPr>
-        <p:spPr>
-          <a:xfrm>
-            <a:off x="914400" y="6210330"/>
-            <a:ext cx="5143500" cy="266730"/>
-          </a:xfrm>
-          <a:prstGeom prst="rect">
-            <a:avLst/>
-          </a:prstGeom>
-          <a:noFill/>
-          <a:ln/>
-        </p:spPr>
-        <p:txBody>
-          <a:bodyPr wrap="square" lIns="0" tIns="0" rIns="0" bIns="0" rtlCol="0" anchor="ctr"/>
-          <a:lstStyle/>
-          <a:p>
-            <a:pPr algn="l" indent="0" marL="0">
-              <a:lnSpc>
-                <a:spcPct val="130000"/>
-              </a:lnSpc>
-              <a:buNone/>
-            </a:pPr>
-            <a:r>
-              <a:rPr lang="en-US" sz="975" dirty="0">
-                <a:solidFill>
-                  <a:srgbClr val="999999"/>
-                </a:solidFill>
-                <a:latin typeface="DM Mono" pitchFamily="34" charset="0"/>
-                <a:ea typeface="DM Mono" pitchFamily="34" charset="-122"/>
-                <a:cs typeface="DM Mono" pitchFamily="34" charset="-120"/>
-              </a:rPr>
-              <a:t>Danmarks Mobilitetsatlas · Beta Mobility</a:t>
-            </a:r>
-            <a:endParaRPr lang="en-US" sz="975" dirty="0"/>
-          </a:p>
-        </p:txBody>
-      </p:sp>
-      <p:sp>
-        <p:nvSpPr>
-          <p:cNvPr id="7" name="Text 5"/>
-          <p:cNvSpPr/>
-          <p:nvPr/>
-        </p:nvSpPr>
-        <p:spPr>
-          <a:xfrm>
-            <a:off x="9372600" y="6210330"/>
-            <a:ext cx="1904970" cy="266730"/>
-          </a:xfrm>
-          <a:prstGeom prst="rect">
-            <a:avLst/>
-          </a:prstGeom>
-          <a:noFill/>
-          <a:ln/>
-        </p:spPr>
-        <p:txBody>
-          <a:bodyPr wrap="square" lIns="0" tIns="0" rIns="0" bIns="0" rtlCol="0" anchor="ctr"/>
-          <a:lstStyle/>
-          <a:p>
-            <a:pPr algn="r" indent="0" marL="0">
-              <a:lnSpc>
-                <a:spcPct val="130000"/>
-              </a:lnSpc>
-              <a:buNone/>
-            </a:pPr>
-            <a:r>
-              <a:rPr lang="en-US" sz="975" dirty="0">
-                <a:solidFill>
-                  <a:srgbClr val="999999"/>
-                </a:solidFill>
-                <a:latin typeface="DM Mono" pitchFamily="34" charset="0"/>
-                <a:ea typeface="DM Mono" pitchFamily="34" charset="-122"/>
-                <a:cs typeface="DM Mono" pitchFamily="34" charset="-120"/>
-              </a:rPr>
-              <a:t>06</a:t>
-            </a:r>
-            <a:endParaRPr lang="en-US" sz="975" dirty="0"/>
-          </a:p>
-        </p:txBody>
-      </p:sp>
     </p:spTree>
   </p:cSld>
   <p:clrMapOvr>
@@ -12614,7 +11452,7 @@
           </a:xfrm>
           <a:prstGeom prst="roundRect">
             <a:avLst>
-              <a:gd name="adj" fmla="val 13328"/>
+              <a:gd name="adj" fmla="val 50000"/>
             </a:avLst>
           </a:prstGeom>
           <a:solidFill>
@@ -12631,7 +11469,7 @@
         </p:nvSpPr>
         <p:spPr>
           <a:xfrm>
-            <a:off x="1143000" y="5200650"/>
+            <a:off x="1219170" y="5200650"/>
             <a:ext cx="4495830" cy="571500"/>
           </a:xfrm>
           <a:prstGeom prst="rect">
@@ -12662,154 +11500,6 @@
               <a:t>→  What the atlas does not capture (yet)</a:t>
             </a:r>
             <a:endParaRPr lang="en-US" sz="1275" dirty="0"/>
-          </a:p>
-        </p:txBody>
-      </p:sp>
-      <p:sp>
-        <p:nvSpPr>
-          <p:cNvPr id="24" name="Text 22"/>
-          <p:cNvSpPr/>
-          <p:nvPr/>
-        </p:nvSpPr>
-        <p:spPr>
-          <a:xfrm>
-            <a:off x="6096030" y="5257800"/>
-            <a:ext cx="5181630" cy="285750"/>
-          </a:xfrm>
-          <a:prstGeom prst="rect">
-            <a:avLst/>
-          </a:prstGeom>
-          <a:noFill/>
-          <a:ln/>
-        </p:spPr>
-        <p:txBody>
-          <a:bodyPr wrap="square" lIns="0" tIns="0" rIns="0" bIns="0" rtlCol="0" anchor="ctr"/>
-          <a:lstStyle/>
-          <a:p>
-            <a:pPr algn="l" indent="0" marL="0">
-              <a:lnSpc>
-                <a:spcPct val="130000"/>
-              </a:lnSpc>
-              <a:buNone/>
-            </a:pPr>
-            <a:r>
-              <a:rPr lang="en-US" sz="975" dirty="0">
-                <a:solidFill>
-                  <a:srgbClr val="666666"/>
-                </a:solidFill>
-                <a:latin typeface="DM Mono" pitchFamily="34" charset="0"/>
-                <a:ea typeface="DM Mono" pitchFamily="34" charset="-122"/>
-                <a:cs typeface="DM Mono" pitchFamily="34" charset="-120"/>
-              </a:rPr>
-              <a:t>~75,000 points · 98 municipalities · Edition 0.4.0 · 22 August 2026</a:t>
-            </a:r>
-            <a:endParaRPr lang="en-US" sz="975" dirty="0"/>
-          </a:p>
-        </p:txBody>
-      </p:sp>
-      <p:sp>
-        <p:nvSpPr>
-          <p:cNvPr id="25" name="Shape 23"/>
-          <p:cNvSpPr/>
-          <p:nvPr/>
-        </p:nvSpPr>
-        <p:spPr>
-          <a:xfrm>
-            <a:off x="914400" y="6096030"/>
-            <a:ext cx="10363170" cy="9510"/>
-          </a:xfrm>
-          <a:prstGeom prst="rect">
-            <a:avLst/>
-          </a:prstGeom>
-          <a:solidFill>
-            <a:srgbClr val="333333">
-              <a:alpha val="25000"/>
-            </a:srgbClr>
-          </a:solidFill>
-          <a:ln/>
-        </p:spPr>
-      </p:sp>
-      <p:sp>
-        <p:nvSpPr>
-          <p:cNvPr id="26" name="Text 24"/>
-          <p:cNvSpPr/>
-          <p:nvPr/>
-        </p:nvSpPr>
-        <p:spPr>
-          <a:xfrm>
-            <a:off x="914400" y="6210330"/>
-            <a:ext cx="5143500" cy="266730"/>
-          </a:xfrm>
-          <a:prstGeom prst="rect">
-            <a:avLst/>
-          </a:prstGeom>
-          <a:noFill/>
-          <a:ln/>
-        </p:spPr>
-        <p:txBody>
-          <a:bodyPr wrap="square" lIns="0" tIns="0" rIns="0" bIns="0" rtlCol="0" anchor="ctr"/>
-          <a:lstStyle/>
-          <a:p>
-            <a:pPr algn="l" indent="0" marL="0">
-              <a:lnSpc>
-                <a:spcPct val="130000"/>
-              </a:lnSpc>
-              <a:buNone/>
-            </a:pPr>
-            <a:r>
-              <a:rPr lang="en-US" sz="975" dirty="0">
-                <a:solidFill>
-                  <a:srgbClr val="666666"/>
-                </a:solidFill>
-                <a:latin typeface="DM Mono" pitchFamily="34" charset="0"/>
-                <a:ea typeface="DM Mono" pitchFamily="34" charset="-122"/>
-                <a:cs typeface="DM Mono" pitchFamily="34" charset="-120"/>
-              </a:rPr>
-              <a:t>Danmarks Mobilitetsatlas · Beta Mobility</a:t>
-            </a:r>
-            <a:endParaRPr lang="en-US" sz="975" dirty="0"/>
-          </a:p>
-        </p:txBody>
-      </p:sp>
-      <p:sp>
-        <p:nvSpPr>
-          <p:cNvPr id="27" name="Text 25"/>
-          <p:cNvSpPr/>
-          <p:nvPr/>
-        </p:nvSpPr>
-        <p:spPr>
-          <a:xfrm>
-            <a:off x="9372600" y="6210330"/>
-            <a:ext cx="1904970" cy="266730"/>
-          </a:xfrm>
-          <a:prstGeom prst="rect">
-            <a:avLst/>
-          </a:prstGeom>
-          <a:noFill/>
-          <a:ln/>
-        </p:spPr>
-        <p:txBody>
-          <a:bodyPr wrap="square" lIns="0" tIns="0" rIns="0" bIns="0" rtlCol="0" anchor="ctr"/>
-          <a:lstStyle/>
-          <a:p>
-            <a:pPr algn="r" indent="0" marL="0">
-              <a:lnSpc>
-                <a:spcPct val="130000"/>
-              </a:lnSpc>
-              <a:buNone/>
-            </a:pPr>
-            <a:r>
-              <a:rPr lang="en-US" sz="975" dirty="0">
-                <a:solidFill>
-                  <a:srgbClr val="666666"/>
-                </a:solidFill>
-                <a:latin typeface="DM Mono" pitchFamily="34" charset="0"/>
-                <a:ea typeface="DM Mono" pitchFamily="34" charset="-122"/>
-                <a:cs typeface="DM Mono" pitchFamily="34" charset="-120"/>
-              </a:rPr>
-              <a:t>07</a:t>
-            </a:r>
-            <a:endParaRPr lang="en-US" sz="975" dirty="0"/>
           </a:p>
         </p:txBody>
       </p:sp>
@@ -16190,154 +14880,6 @@
           </a:p>
         </p:txBody>
       </p:sp>
-      <p:sp>
-        <p:nvSpPr>
-          <p:cNvPr id="14" name="Text 11"/>
-          <p:cNvSpPr/>
-          <p:nvPr/>
-        </p:nvSpPr>
-        <p:spPr>
-          <a:xfrm>
-            <a:off x="914400" y="5753130"/>
-            <a:ext cx="10363170" cy="285750"/>
-          </a:xfrm>
-          <a:prstGeom prst="rect">
-            <a:avLst/>
-          </a:prstGeom>
-          <a:noFill/>
-          <a:ln/>
-        </p:spPr>
-        <p:txBody>
-          <a:bodyPr wrap="square" lIns="0" tIns="0" rIns="0" bIns="0" rtlCol="0" anchor="ctr"/>
-          <a:lstStyle/>
-          <a:p>
-            <a:pPr algn="l" indent="0" marL="0">
-              <a:lnSpc>
-                <a:spcPct val="130000"/>
-              </a:lnSpc>
-              <a:buNone/>
-            </a:pPr>
-            <a:r>
-              <a:rPr lang="en-US" sz="975" dirty="0">
-                <a:solidFill>
-                  <a:srgbClr val="666666"/>
-                </a:solidFill>
-                <a:latin typeface="DM Mono" pitchFamily="34" charset="0"/>
-                <a:ea typeface="DM Mono" pitchFamily="34" charset="-122"/>
-                <a:cs typeface="DM Mono" pitchFamily="34" charset="-120"/>
-              </a:rPr>
-              <a:t>Beta · Edition 0.4.0 · 22 August 2026 · Data as of 2026-09-09</a:t>
-            </a:r>
-            <a:endParaRPr lang="en-US" sz="975" dirty="0"/>
-          </a:p>
-        </p:txBody>
-      </p:sp>
-      <p:sp>
-        <p:nvSpPr>
-          <p:cNvPr id="15" name="Shape 12"/>
-          <p:cNvSpPr/>
-          <p:nvPr/>
-        </p:nvSpPr>
-        <p:spPr>
-          <a:xfrm>
-            <a:off x="914400" y="6096030"/>
-            <a:ext cx="10363170" cy="9510"/>
-          </a:xfrm>
-          <a:prstGeom prst="rect">
-            <a:avLst/>
-          </a:prstGeom>
-          <a:solidFill>
-            <a:srgbClr val="333333">
-              <a:alpha val="25000"/>
-            </a:srgbClr>
-          </a:solidFill>
-          <a:ln/>
-        </p:spPr>
-      </p:sp>
-      <p:sp>
-        <p:nvSpPr>
-          <p:cNvPr id="16" name="Text 13"/>
-          <p:cNvSpPr/>
-          <p:nvPr/>
-        </p:nvSpPr>
-        <p:spPr>
-          <a:xfrm>
-            <a:off x="914400" y="6210330"/>
-            <a:ext cx="5143500" cy="266730"/>
-          </a:xfrm>
-          <a:prstGeom prst="rect">
-            <a:avLst/>
-          </a:prstGeom>
-          <a:noFill/>
-          <a:ln/>
-        </p:spPr>
-        <p:txBody>
-          <a:bodyPr wrap="square" lIns="0" tIns="0" rIns="0" bIns="0" rtlCol="0" anchor="ctr"/>
-          <a:lstStyle/>
-          <a:p>
-            <a:pPr algn="l" indent="0" marL="0">
-              <a:lnSpc>
-                <a:spcPct val="130000"/>
-              </a:lnSpc>
-              <a:buNone/>
-            </a:pPr>
-            <a:r>
-              <a:rPr lang="en-US" sz="975" dirty="0">
-                <a:solidFill>
-                  <a:srgbClr val="666666"/>
-                </a:solidFill>
-                <a:latin typeface="DM Mono" pitchFamily="34" charset="0"/>
-                <a:ea typeface="DM Mono" pitchFamily="34" charset="-122"/>
-                <a:cs typeface="DM Mono" pitchFamily="34" charset="-120"/>
-              </a:rPr>
-              <a:t>Danmarks Mobilitetsatlas · Beta Mobility</a:t>
-            </a:r>
-            <a:endParaRPr lang="en-US" sz="975" dirty="0"/>
-          </a:p>
-        </p:txBody>
-      </p:sp>
-      <p:sp>
-        <p:nvSpPr>
-          <p:cNvPr id="17" name="Text 14"/>
-          <p:cNvSpPr/>
-          <p:nvPr/>
-        </p:nvSpPr>
-        <p:spPr>
-          <a:xfrm>
-            <a:off x="9372600" y="6210330"/>
-            <a:ext cx="1904970" cy="266730"/>
-          </a:xfrm>
-          <a:prstGeom prst="rect">
-            <a:avLst/>
-          </a:prstGeom>
-          <a:noFill/>
-          <a:ln/>
-        </p:spPr>
-        <p:txBody>
-          <a:bodyPr wrap="square" lIns="0" tIns="0" rIns="0" bIns="0" rtlCol="0" anchor="ctr"/>
-          <a:lstStyle/>
-          <a:p>
-            <a:pPr algn="r" indent="0" marL="0">
-              <a:lnSpc>
-                <a:spcPct val="130000"/>
-              </a:lnSpc>
-              <a:buNone/>
-            </a:pPr>
-            <a:r>
-              <a:rPr lang="en-US" sz="975" dirty="0">
-                <a:solidFill>
-                  <a:srgbClr val="666666"/>
-                </a:solidFill>
-                <a:latin typeface="DM Mono" pitchFamily="34" charset="0"/>
-                <a:ea typeface="DM Mono" pitchFamily="34" charset="-122"/>
-                <a:cs typeface="DM Mono" pitchFamily="34" charset="-120"/>
-              </a:rPr>
-              <a:t>08</a:t>
-            </a:r>
-            <a:endParaRPr lang="en-US" sz="975" dirty="0"/>
-          </a:p>
-        </p:txBody>
-      </p:sp>
     </p:spTree>
   </p:cSld>
   <p:clrMapOvr>
